--- a/slides/day 2/D2C1_ANN.pptx
+++ b/slides/day 2/D2C1_ANN.pptx
@@ -5,26 +5,29 @@
     <p:sldMasterId id="2147483648" r:id="rId1"/>
   </p:sldMasterIdLst>
   <p:notesMasterIdLst>
-    <p:notesMasterId r:id="rId19"/>
+    <p:notesMasterId r:id="rId22"/>
   </p:notesMasterIdLst>
   <p:sldIdLst>
     <p:sldId id="256" r:id="rId2"/>
     <p:sldId id="258" r:id="rId3"/>
     <p:sldId id="259" r:id="rId4"/>
-    <p:sldId id="284" r:id="rId5"/>
-    <p:sldId id="260" r:id="rId6"/>
-    <p:sldId id="261" r:id="rId7"/>
-    <p:sldId id="264" r:id="rId8"/>
-    <p:sldId id="265" r:id="rId9"/>
-    <p:sldId id="283" r:id="rId10"/>
-    <p:sldId id="270" r:id="rId11"/>
-    <p:sldId id="271" r:id="rId12"/>
-    <p:sldId id="275" r:id="rId13"/>
-    <p:sldId id="277" r:id="rId14"/>
-    <p:sldId id="278" r:id="rId15"/>
-    <p:sldId id="280" r:id="rId16"/>
-    <p:sldId id="281" r:id="rId17"/>
-    <p:sldId id="285" r:id="rId18"/>
+    <p:sldId id="287" r:id="rId5"/>
+    <p:sldId id="284" r:id="rId6"/>
+    <p:sldId id="260" r:id="rId7"/>
+    <p:sldId id="261" r:id="rId8"/>
+    <p:sldId id="264" r:id="rId9"/>
+    <p:sldId id="288" r:id="rId10"/>
+    <p:sldId id="265" r:id="rId11"/>
+    <p:sldId id="283" r:id="rId12"/>
+    <p:sldId id="270" r:id="rId13"/>
+    <p:sldId id="271" r:id="rId14"/>
+    <p:sldId id="275" r:id="rId15"/>
+    <p:sldId id="277" r:id="rId16"/>
+    <p:sldId id="278" r:id="rId17"/>
+    <p:sldId id="289" r:id="rId18"/>
+    <p:sldId id="280" r:id="rId19"/>
+    <p:sldId id="281" r:id="rId20"/>
+    <p:sldId id="285" r:id="rId21"/>
   </p:sldIdLst>
   <p:sldSz cx="12192000" cy="6858000"/>
   <p:notesSz cx="6858000" cy="9144000"/>
@@ -213,7 +216,7 @@
           <a:p>
             <a:fld id="{FF5685EE-3D40-0A4E-BB88-46887330FC0A}" type="datetimeFigureOut">
               <a:rPr lang="en-US" smtClean="0"/>
-              <a:t>10/6/25</a:t>
+              <a:t>2/18/26</a:t>
             </a:fld>
             <a:endParaRPr lang="en-US"/>
           </a:p>
@@ -481,6 +484,375 @@
 </p:notesMaster>
 </file>
 
+<file path=ppt/notesSlides/notesSlide1.xml><?xml version="1.0" encoding="utf-8"?>
+<p:notes xmlns:a="http://schemas.openxmlformats.org/drawingml/2006/main" xmlns:r="http://schemas.openxmlformats.org/officeDocument/2006/relationships" xmlns:p="http://schemas.openxmlformats.org/presentationml/2006/main">
+  <p:cSld>
+    <p:spTree>
+      <p:nvGrpSpPr>
+        <p:cNvPr id="1" name=""/>
+        <p:cNvGrpSpPr/>
+        <p:nvPr/>
+      </p:nvGrpSpPr>
+      <p:grpSpPr>
+        <a:xfrm>
+          <a:off x="0" y="0"/>
+          <a:ext cx="0" cy="0"/>
+          <a:chOff x="0" y="0"/>
+          <a:chExt cx="0" cy="0"/>
+        </a:xfrm>
+      </p:grpSpPr>
+      <p:sp>
+        <p:nvSpPr>
+          <p:cNvPr id="2" name="Slide Image Placeholder 1"/>
+          <p:cNvSpPr>
+            <a:spLocks noGrp="1" noRot="1" noChangeAspect="1"/>
+          </p:cNvSpPr>
+          <p:nvPr>
+            <p:ph type="sldImg"/>
+          </p:nvPr>
+        </p:nvSpPr>
+        <p:spPr/>
+      </p:sp>
+      <p:sp>
+        <p:nvSpPr>
+          <p:cNvPr id="3" name="Notes Placeholder 2"/>
+          <p:cNvSpPr>
+            <a:spLocks noGrp="1"/>
+          </p:cNvSpPr>
+          <p:nvPr>
+            <p:ph type="body" idx="1"/>
+          </p:nvPr>
+        </p:nvSpPr>
+        <p:spPr/>
+        <p:txBody>
+          <a:bodyPr/>
+          <a:lstStyle/>
+          <a:p>
+            <a:r>
+              <a:rPr lang="en-US"/>
+              <a:t>Do not modify the notes in this section to avoid tampering with the Poll Everywhere activity.
+More info at polleverywhere.com/support
+In our network, if a specific input x results in z_1 = -2.5 and z_2 = 1.8, what are the values of the hidden activations h_1 and h_2?</a:t>
+            </a:r>
+          </a:p>
+          <a:p>
+            <a:r>
+              <a:rPr lang="en-US"/>
+              <a:t>https://www.polleverywhere.com/multiple_choice_polls/G2QogxeXGHOTBWTu8yCa0?state=opened&amp;flow=Default&amp;onscreen=persist</a:t>
+            </a:r>
+          </a:p>
+        </p:txBody>
+      </p:sp>
+      <p:sp>
+        <p:nvSpPr>
+          <p:cNvPr id="4" name="Slide Number Placeholder 3"/>
+          <p:cNvSpPr>
+            <a:spLocks noGrp="1"/>
+          </p:cNvSpPr>
+          <p:nvPr>
+            <p:ph type="sldNum" sz="quarter" idx="5"/>
+          </p:nvPr>
+        </p:nvSpPr>
+        <p:spPr/>
+        <p:txBody>
+          <a:bodyPr/>
+          <a:lstStyle/>
+          <a:p>
+            <a:fld id="{30752F2A-FA59-1746-ABA5-28C394E5ED08}" type="slidenum">
+              <a:rPr lang="en-US" smtClean="0"/>
+              <a:t>4</a:t>
+            </a:fld>
+            <a:endParaRPr lang="en-US"/>
+          </a:p>
+        </p:txBody>
+      </p:sp>
+    </p:spTree>
+    <p:extLst>
+      <p:ext uri="{BB962C8B-B14F-4D97-AF65-F5344CB8AC3E}">
+        <p14:creationId xmlns:p14="http://schemas.microsoft.com/office/powerpoint/2010/main" val="207167147"/>
+      </p:ext>
+    </p:extLst>
+  </p:cSld>
+  <p:clrMapOvr>
+    <a:masterClrMapping/>
+  </p:clrMapOvr>
+</p:notes>
+</file>
+
+<file path=ppt/notesSlides/notesSlide2.xml><?xml version="1.0" encoding="utf-8"?>
+<p:notes xmlns:a="http://schemas.openxmlformats.org/drawingml/2006/main" xmlns:r="http://schemas.openxmlformats.org/officeDocument/2006/relationships" xmlns:p="http://schemas.openxmlformats.org/presentationml/2006/main">
+  <p:cSld>
+    <p:spTree>
+      <p:nvGrpSpPr>
+        <p:cNvPr id="1" name=""/>
+        <p:cNvGrpSpPr/>
+        <p:nvPr/>
+      </p:nvGrpSpPr>
+      <p:grpSpPr>
+        <a:xfrm>
+          <a:off x="0" y="0"/>
+          <a:ext cx="0" cy="0"/>
+          <a:chOff x="0" y="0"/>
+          <a:chExt cx="0" cy="0"/>
+        </a:xfrm>
+      </p:grpSpPr>
+      <p:sp>
+        <p:nvSpPr>
+          <p:cNvPr id="2" name="Slide Image Placeholder 1"/>
+          <p:cNvSpPr>
+            <a:spLocks noGrp="1" noRot="1" noChangeAspect="1"/>
+          </p:cNvSpPr>
+          <p:nvPr>
+            <p:ph type="sldImg"/>
+          </p:nvPr>
+        </p:nvSpPr>
+        <p:spPr/>
+      </p:sp>
+      <p:sp>
+        <p:nvSpPr>
+          <p:cNvPr id="3" name="Notes Placeholder 2"/>
+          <p:cNvSpPr>
+            <a:spLocks noGrp="1"/>
+          </p:cNvSpPr>
+          <p:nvPr>
+            <p:ph type="body" idx="1"/>
+          </p:nvPr>
+        </p:nvSpPr>
+        <p:spPr/>
+        <p:txBody>
+          <a:bodyPr/>
+          <a:lstStyle/>
+          <a:p>
+            <a:r>
+              <a:rPr lang="en-US"/>
+              <a:t>Do not modify the notes in this section to avoid tampering with the Poll Everywhere activity.
+More info at polleverywhere.com/support
+If our target y = 1 and the network predicts hat{y} = 0.99, what will happen to the magnitude of the weight updates in the next step?</a:t>
+            </a:r>
+          </a:p>
+          <a:p>
+            <a:r>
+              <a:rPr lang="en-US"/>
+              <a:t>https://www.polleverywhere.com/multiple_choice_polls/JZznzugwkVdpZNiwRE2Af?state=opened&amp;flow=Default&amp;onscreen=persist</a:t>
+            </a:r>
+          </a:p>
+        </p:txBody>
+      </p:sp>
+      <p:sp>
+        <p:nvSpPr>
+          <p:cNvPr id="4" name="Slide Number Placeholder 3"/>
+          <p:cNvSpPr>
+            <a:spLocks noGrp="1"/>
+          </p:cNvSpPr>
+          <p:nvPr>
+            <p:ph type="sldNum" sz="quarter" idx="5"/>
+          </p:nvPr>
+        </p:nvSpPr>
+        <p:spPr/>
+        <p:txBody>
+          <a:bodyPr/>
+          <a:lstStyle/>
+          <a:p>
+            <a:fld id="{30752F2A-FA59-1746-ABA5-28C394E5ED08}" type="slidenum">
+              <a:rPr lang="en-US" smtClean="0"/>
+              <a:t>9</a:t>
+            </a:fld>
+            <a:endParaRPr lang="en-US"/>
+          </a:p>
+        </p:txBody>
+      </p:sp>
+    </p:spTree>
+    <p:extLst>
+      <p:ext uri="{BB962C8B-B14F-4D97-AF65-F5344CB8AC3E}">
+        <p14:creationId xmlns:p14="http://schemas.microsoft.com/office/powerpoint/2010/main" val="1798873737"/>
+      </p:ext>
+    </p:extLst>
+  </p:cSld>
+  <p:clrMapOvr>
+    <a:masterClrMapping/>
+  </p:clrMapOvr>
+</p:notes>
+</file>
+
+<file path=ppt/notesSlides/notesSlide3.xml><?xml version="1.0" encoding="utf-8"?>
+<p:notes xmlns:a="http://schemas.openxmlformats.org/drawingml/2006/main" xmlns:r="http://schemas.openxmlformats.org/officeDocument/2006/relationships" xmlns:p="http://schemas.openxmlformats.org/presentationml/2006/main">
+  <p:cSld>
+    <p:spTree>
+      <p:nvGrpSpPr>
+        <p:cNvPr id="1" name=""/>
+        <p:cNvGrpSpPr/>
+        <p:nvPr/>
+      </p:nvGrpSpPr>
+      <p:grpSpPr>
+        <a:xfrm>
+          <a:off x="0" y="0"/>
+          <a:ext cx="0" cy="0"/>
+          <a:chOff x="0" y="0"/>
+          <a:chExt cx="0" cy="0"/>
+        </a:xfrm>
+      </p:grpSpPr>
+      <p:sp>
+        <p:nvSpPr>
+          <p:cNvPr id="2" name="Slide Image Placeholder 1"/>
+          <p:cNvSpPr>
+            <a:spLocks noGrp="1" noRot="1" noChangeAspect="1"/>
+          </p:cNvSpPr>
+          <p:nvPr>
+            <p:ph type="sldImg"/>
+          </p:nvPr>
+        </p:nvSpPr>
+        <p:spPr/>
+      </p:sp>
+      <p:sp>
+        <p:nvSpPr>
+          <p:cNvPr id="3" name="Notes Placeholder 2"/>
+          <p:cNvSpPr>
+            <a:spLocks noGrp="1"/>
+          </p:cNvSpPr>
+          <p:nvPr>
+            <p:ph type="body" idx="1"/>
+          </p:nvPr>
+        </p:nvSpPr>
+        <p:spPr/>
+        <p:txBody>
+          <a:bodyPr/>
+          <a:lstStyle/>
+          <a:p>
+            <a:endParaRPr lang="en-US"/>
+          </a:p>
+        </p:txBody>
+      </p:sp>
+      <p:sp>
+        <p:nvSpPr>
+          <p:cNvPr id="4" name="Slide Number Placeholder 3"/>
+          <p:cNvSpPr>
+            <a:spLocks noGrp="1"/>
+          </p:cNvSpPr>
+          <p:nvPr>
+            <p:ph type="sldNum" sz="quarter" idx="5"/>
+          </p:nvPr>
+        </p:nvSpPr>
+        <p:spPr/>
+        <p:txBody>
+          <a:bodyPr/>
+          <a:lstStyle/>
+          <a:p>
+            <a:fld id="{30752F2A-FA59-1746-ABA5-28C394E5ED08}" type="slidenum">
+              <a:rPr lang="en-US" smtClean="0"/>
+              <a:t>16</a:t>
+            </a:fld>
+            <a:endParaRPr lang="en-US"/>
+          </a:p>
+        </p:txBody>
+      </p:sp>
+    </p:spTree>
+    <p:extLst>
+      <p:ext uri="{BB962C8B-B14F-4D97-AF65-F5344CB8AC3E}">
+        <p14:creationId xmlns:p14="http://schemas.microsoft.com/office/powerpoint/2010/main" val="2814735115"/>
+      </p:ext>
+    </p:extLst>
+  </p:cSld>
+  <p:clrMapOvr>
+    <a:masterClrMapping/>
+  </p:clrMapOvr>
+</p:notes>
+</file>
+
+<file path=ppt/notesSlides/notesSlide4.xml><?xml version="1.0" encoding="utf-8"?>
+<p:notes xmlns:a="http://schemas.openxmlformats.org/drawingml/2006/main" xmlns:r="http://schemas.openxmlformats.org/officeDocument/2006/relationships" xmlns:p="http://schemas.openxmlformats.org/presentationml/2006/main">
+  <p:cSld>
+    <p:spTree>
+      <p:nvGrpSpPr>
+        <p:cNvPr id="1" name=""/>
+        <p:cNvGrpSpPr/>
+        <p:nvPr/>
+      </p:nvGrpSpPr>
+      <p:grpSpPr>
+        <a:xfrm>
+          <a:off x="0" y="0"/>
+          <a:ext cx="0" cy="0"/>
+          <a:chOff x="0" y="0"/>
+          <a:chExt cx="0" cy="0"/>
+        </a:xfrm>
+      </p:grpSpPr>
+      <p:sp>
+        <p:nvSpPr>
+          <p:cNvPr id="2" name="Slide Image Placeholder 1"/>
+          <p:cNvSpPr>
+            <a:spLocks noGrp="1" noRot="1" noChangeAspect="1"/>
+          </p:cNvSpPr>
+          <p:nvPr>
+            <p:ph type="sldImg"/>
+          </p:nvPr>
+        </p:nvSpPr>
+        <p:spPr/>
+      </p:sp>
+      <p:sp>
+        <p:nvSpPr>
+          <p:cNvPr id="3" name="Notes Placeholder 2"/>
+          <p:cNvSpPr>
+            <a:spLocks noGrp="1"/>
+          </p:cNvSpPr>
+          <p:nvPr>
+            <p:ph type="body" idx="1"/>
+          </p:nvPr>
+        </p:nvSpPr>
+        <p:spPr/>
+        <p:txBody>
+          <a:bodyPr/>
+          <a:lstStyle/>
+          <a:p>
+            <a:r>
+              <a:rPr lang="en-US"/>
+              <a:t>Do not modify the notes in this section to avoid tampering with the Poll Everywhere activity.
+More info at polleverywhere.com/support
+Suppose we are in the middle of a forward pass. The input x and current weights result in a pre-activation at h_2 of z_2 = -1.5. Click on the single node that is preventing any gradient information from flowing back to its connected input weights</a:t>
+            </a:r>
+          </a:p>
+          <a:p>
+            <a:r>
+              <a:rPr lang="en-US"/>
+              <a:t>https://www.polleverywhere.com/clickable_images/yRk7j8s6JV63O3Z1SD3Is</a:t>
+            </a:r>
+          </a:p>
+        </p:txBody>
+      </p:sp>
+      <p:sp>
+        <p:nvSpPr>
+          <p:cNvPr id="4" name="Slide Number Placeholder 3"/>
+          <p:cNvSpPr>
+            <a:spLocks noGrp="1"/>
+          </p:cNvSpPr>
+          <p:nvPr>
+            <p:ph type="sldNum" sz="quarter" idx="5"/>
+          </p:nvPr>
+        </p:nvSpPr>
+        <p:spPr/>
+        <p:txBody>
+          <a:bodyPr/>
+          <a:lstStyle/>
+          <a:p>
+            <a:fld id="{30752F2A-FA59-1746-ABA5-28C394E5ED08}" type="slidenum">
+              <a:rPr lang="en-US" smtClean="0"/>
+              <a:t>17</a:t>
+            </a:fld>
+            <a:endParaRPr lang="en-US"/>
+          </a:p>
+        </p:txBody>
+      </p:sp>
+    </p:spTree>
+    <p:extLst>
+      <p:ext uri="{BB962C8B-B14F-4D97-AF65-F5344CB8AC3E}">
+        <p14:creationId xmlns:p14="http://schemas.microsoft.com/office/powerpoint/2010/main" val="3821160315"/>
+      </p:ext>
+    </p:extLst>
+  </p:cSld>
+  <p:clrMapOvr>
+    <a:masterClrMapping/>
+  </p:clrMapOvr>
+</p:notes>
+</file>
+
 <file path=ppt/slideLayouts/slideLayout1.xml><?xml version="1.0" encoding="utf-8"?>
 <p:sldLayout xmlns:a="http://schemas.openxmlformats.org/drawingml/2006/main" xmlns:r="http://schemas.openxmlformats.org/officeDocument/2006/relationships" xmlns:p="http://schemas.openxmlformats.org/presentationml/2006/main" preserve="1" userDrawn="1">
   <p:cSld name="Title Slide Colour">
@@ -595,7 +967,7 @@
             <a:fld id="{16F2FB5F-D553-C945-B874-A642CC0C851F}" type="datetime3">
               <a:rPr lang="en-IE" smtClean="0"/>
               <a:pPr/>
-              <a:t>6 October 2025</a:t>
+              <a:t>18 February 2026</a:t>
             </a:fld>
             <a:endParaRPr lang="en-US" dirty="0"/>
           </a:p>
@@ -1306,6 +1678,232 @@
 </p:sldLayout>
 </file>
 
+<file path=ppt/slideLayouts/slideLayout13.xml><?xml version="1.0" encoding="utf-8"?>
+<p:sldLayout xmlns:a="http://schemas.openxmlformats.org/drawingml/2006/main" xmlns:r="http://schemas.openxmlformats.org/officeDocument/2006/relationships" xmlns:p="http://schemas.openxmlformats.org/presentationml/2006/main" type="title" preserve="1">
+  <p:cSld name="1_Title Slide">
+    <p:spTree>
+      <p:nvGrpSpPr>
+        <p:cNvPr id="1" name=""/>
+        <p:cNvGrpSpPr/>
+        <p:nvPr/>
+      </p:nvGrpSpPr>
+      <p:grpSpPr>
+        <a:xfrm>
+          <a:off x="0" y="0"/>
+          <a:ext cx="0" cy="0"/>
+          <a:chOff x="0" y="0"/>
+          <a:chExt cx="0" cy="0"/>
+        </a:xfrm>
+      </p:grpSpPr>
+      <p:sp>
+        <p:nvSpPr>
+          <p:cNvPr id="2" name="Title 1">
+            <a:extLst>
+              <a:ext uri="{FF2B5EF4-FFF2-40B4-BE49-F238E27FC236}">
+                <a16:creationId xmlns:a16="http://schemas.microsoft.com/office/drawing/2014/main" id="{942FEAF1-3ED0-FCAD-E69C-EC71DAA88632}"/>
+              </a:ext>
+            </a:extLst>
+          </p:cNvPr>
+          <p:cNvSpPr>
+            <a:spLocks noGrp="1"/>
+          </p:cNvSpPr>
+          <p:nvPr>
+            <p:ph type="ctrTitle"/>
+          </p:nvPr>
+        </p:nvSpPr>
+        <p:spPr>
+          <a:xfrm>
+            <a:off x="1524000" y="1122363"/>
+            <a:ext cx="9144000" cy="2387600"/>
+          </a:xfrm>
+        </p:spPr>
+        <p:txBody>
+          <a:bodyPr anchor="b"/>
+          <a:lstStyle>
+            <a:lvl1pPr algn="ctr">
+              <a:defRPr sz="6000"/>
+            </a:lvl1pPr>
+          </a:lstStyle>
+          <a:p>
+            <a:r>
+              <a:rPr lang="en-GB"/>
+              <a:t>Click to edit Master title style</a:t>
+            </a:r>
+            <a:endParaRPr lang="en-US"/>
+          </a:p>
+        </p:txBody>
+      </p:sp>
+      <p:sp>
+        <p:nvSpPr>
+          <p:cNvPr id="3" name="Subtitle 2">
+            <a:extLst>
+              <a:ext uri="{FF2B5EF4-FFF2-40B4-BE49-F238E27FC236}">
+                <a16:creationId xmlns:a16="http://schemas.microsoft.com/office/drawing/2014/main" id="{ECFBAD22-D651-FB67-8C83-4CAF9A0A3731}"/>
+              </a:ext>
+            </a:extLst>
+          </p:cNvPr>
+          <p:cNvSpPr>
+            <a:spLocks noGrp="1"/>
+          </p:cNvSpPr>
+          <p:nvPr>
+            <p:ph type="subTitle" idx="1"/>
+          </p:nvPr>
+        </p:nvSpPr>
+        <p:spPr>
+          <a:xfrm>
+            <a:off x="1524000" y="3602038"/>
+            <a:ext cx="9144000" cy="1655762"/>
+          </a:xfrm>
+        </p:spPr>
+        <p:txBody>
+          <a:bodyPr/>
+          <a:lstStyle>
+            <a:lvl1pPr marL="0" indent="0" algn="ctr">
+              <a:buNone/>
+              <a:defRPr sz="2400"/>
+            </a:lvl1pPr>
+            <a:lvl2pPr marL="457200" indent="0" algn="ctr">
+              <a:buNone/>
+              <a:defRPr sz="2000"/>
+            </a:lvl2pPr>
+            <a:lvl3pPr marL="914400" indent="0" algn="ctr">
+              <a:buNone/>
+              <a:defRPr sz="1800"/>
+            </a:lvl3pPr>
+            <a:lvl4pPr marL="1371600" indent="0" algn="ctr">
+              <a:buNone/>
+              <a:defRPr sz="1600"/>
+            </a:lvl4pPr>
+            <a:lvl5pPr marL="1828800" indent="0" algn="ctr">
+              <a:buNone/>
+              <a:defRPr sz="1600"/>
+            </a:lvl5pPr>
+            <a:lvl6pPr marL="2286000" indent="0" algn="ctr">
+              <a:buNone/>
+              <a:defRPr sz="1600"/>
+            </a:lvl6pPr>
+            <a:lvl7pPr marL="2743200" indent="0" algn="ctr">
+              <a:buNone/>
+              <a:defRPr sz="1600"/>
+            </a:lvl7pPr>
+            <a:lvl8pPr marL="3200400" indent="0" algn="ctr">
+              <a:buNone/>
+              <a:defRPr sz="1600"/>
+            </a:lvl8pPr>
+            <a:lvl9pPr marL="3657600" indent="0" algn="ctr">
+              <a:buNone/>
+              <a:defRPr sz="1600"/>
+            </a:lvl9pPr>
+          </a:lstStyle>
+          <a:p>
+            <a:r>
+              <a:rPr lang="en-GB"/>
+              <a:t>Click to edit Master subtitle style</a:t>
+            </a:r>
+            <a:endParaRPr lang="en-US"/>
+          </a:p>
+        </p:txBody>
+      </p:sp>
+      <p:sp>
+        <p:nvSpPr>
+          <p:cNvPr id="4" name="Date Placeholder 3">
+            <a:extLst>
+              <a:ext uri="{FF2B5EF4-FFF2-40B4-BE49-F238E27FC236}">
+                <a16:creationId xmlns:a16="http://schemas.microsoft.com/office/drawing/2014/main" id="{3DF986FE-4B27-A6DB-9980-9CBD01B42417}"/>
+              </a:ext>
+            </a:extLst>
+          </p:cNvPr>
+          <p:cNvSpPr>
+            <a:spLocks noGrp="1"/>
+          </p:cNvSpPr>
+          <p:nvPr>
+            <p:ph type="dt" sz="half" idx="10"/>
+          </p:nvPr>
+        </p:nvSpPr>
+        <p:spPr/>
+        <p:txBody>
+          <a:bodyPr/>
+          <a:lstStyle/>
+          <a:p>
+            <a:fld id="{C1B28D5F-B017-3B47-9775-DA319F6143FF}" type="datetime3">
+              <a:rPr lang="en-IE" smtClean="0"/>
+              <a:t>18 February 2026</a:t>
+            </a:fld>
+            <a:endParaRPr lang="en-US" dirty="0"/>
+          </a:p>
+        </p:txBody>
+      </p:sp>
+      <p:sp>
+        <p:nvSpPr>
+          <p:cNvPr id="5" name="Footer Placeholder 4">
+            <a:extLst>
+              <a:ext uri="{FF2B5EF4-FFF2-40B4-BE49-F238E27FC236}">
+                <a16:creationId xmlns:a16="http://schemas.microsoft.com/office/drawing/2014/main" id="{0EFB662D-1E95-F13B-D1F5-322050B10C28}"/>
+              </a:ext>
+            </a:extLst>
+          </p:cNvPr>
+          <p:cNvSpPr>
+            <a:spLocks noGrp="1"/>
+          </p:cNvSpPr>
+          <p:nvPr>
+            <p:ph type="ftr" sz="quarter" idx="11"/>
+          </p:nvPr>
+        </p:nvSpPr>
+        <p:spPr/>
+        <p:txBody>
+          <a:bodyPr/>
+          <a:lstStyle/>
+          <a:p>
+            <a:r>
+              <a:rPr lang="en-US"/>
+              <a:t>Andrew Parnell</a:t>
+            </a:r>
+            <a:endParaRPr lang="en-US" dirty="0"/>
+          </a:p>
+        </p:txBody>
+      </p:sp>
+      <p:sp>
+        <p:nvSpPr>
+          <p:cNvPr id="6" name="Slide Number Placeholder 5">
+            <a:extLst>
+              <a:ext uri="{FF2B5EF4-FFF2-40B4-BE49-F238E27FC236}">
+                <a16:creationId xmlns:a16="http://schemas.microsoft.com/office/drawing/2014/main" id="{9726EB14-149D-65D0-279D-F0479D9E169D}"/>
+              </a:ext>
+            </a:extLst>
+          </p:cNvPr>
+          <p:cNvSpPr>
+            <a:spLocks noGrp="1"/>
+          </p:cNvSpPr>
+          <p:nvPr>
+            <p:ph type="sldNum" sz="quarter" idx="12"/>
+          </p:nvPr>
+        </p:nvSpPr>
+        <p:spPr/>
+        <p:txBody>
+          <a:bodyPr/>
+          <a:lstStyle/>
+          <a:p>
+            <a:fld id="{5A064C77-022D-3743-A04E-645624933D1D}" type="slidenum">
+              <a:rPr lang="en-US" smtClean="0"/>
+              <a:t>‹#›</a:t>
+            </a:fld>
+            <a:endParaRPr lang="en-US"/>
+          </a:p>
+        </p:txBody>
+      </p:sp>
+    </p:spTree>
+    <p:extLst>
+      <p:ext uri="{BB962C8B-B14F-4D97-AF65-F5344CB8AC3E}">
+        <p14:creationId xmlns:p14="http://schemas.microsoft.com/office/powerpoint/2010/main" val="2069983462"/>
+      </p:ext>
+    </p:extLst>
+  </p:cSld>
+  <p:clrMapOvr>
+    <a:masterClrMapping/>
+  </p:clrMapOvr>
+</p:sldLayout>
+</file>
+
 <file path=ppt/slideLayouts/slideLayout2.xml><?xml version="1.0" encoding="utf-8"?>
 <p:sldLayout xmlns:a="http://schemas.openxmlformats.org/drawingml/2006/main" xmlns:r="http://schemas.openxmlformats.org/officeDocument/2006/relationships" xmlns:p="http://schemas.openxmlformats.org/presentationml/2006/main" preserve="1" userDrawn="1">
   <p:cSld name="Title Slide">
@@ -1450,7 +2048,7 @@
             <a:fld id="{16F2FB5F-D553-C945-B874-A642CC0C851F}" type="datetime3">
               <a:rPr lang="en-IE" smtClean="0"/>
               <a:pPr/>
-              <a:t>6 October 2025</a:t>
+              <a:t>18 February 2026</a:t>
             </a:fld>
             <a:endParaRPr lang="en-US" dirty="0"/>
           </a:p>
@@ -1725,7 +2323,7 @@
             <a:fld id="{16F2FB5F-D553-C945-B874-A642CC0C851F}" type="datetime3">
               <a:rPr lang="en-IE" smtClean="0"/>
               <a:pPr/>
-              <a:t>6 October 2025</a:t>
+              <a:t>18 February 2026</a:t>
             </a:fld>
             <a:endParaRPr lang="en-US" dirty="0"/>
           </a:p>
@@ -1900,7 +2498,7 @@
           <a:p>
             <a:fld id="{BEF41344-4D35-F145-B477-F6239A2130EE}" type="datetime3">
               <a:rPr lang="en-IE" smtClean="0"/>
-              <a:t>6 October 2025</a:t>
+              <a:t>18 February 2026</a:t>
             </a:fld>
             <a:endParaRPr lang="en-US"/>
           </a:p>
@@ -2176,7 +2774,7 @@
           <a:p>
             <a:fld id="{07196900-CA2A-2D43-9641-C5C0DD2D22D3}" type="datetime3">
               <a:rPr lang="en-IE" smtClean="0"/>
-              <a:t>6 October 2025</a:t>
+              <a:t>18 February 2026</a:t>
             </a:fld>
             <a:endParaRPr lang="en-US"/>
           </a:p>
@@ -2444,7 +3042,7 @@
           <a:p>
             <a:fld id="{8AB1A910-F8E0-D541-83F2-2CFD6E718762}" type="datetime3">
               <a:rPr lang="en-IE" smtClean="0"/>
-              <a:t>6 October 2025</a:t>
+              <a:t>18 February 2026</a:t>
             </a:fld>
             <a:endParaRPr lang="en-US"/>
           </a:p>
@@ -2586,7 +3184,7 @@
           <a:p>
             <a:fld id="{7E245B59-D3F3-5B43-BDD1-6C7B7CFD2AA6}" type="datetime3">
               <a:rPr lang="en-IE" smtClean="0"/>
-              <a:t>6 October 2025</a:t>
+              <a:t>18 February 2026</a:t>
             </a:fld>
             <a:endParaRPr lang="en-US"/>
           </a:p>
@@ -2699,7 +3297,7 @@
           <a:p>
             <a:fld id="{AD77DDCF-3644-8C44-AE36-2C59F897E125}" type="datetime3">
               <a:rPr lang="en-IE" smtClean="0"/>
-              <a:t>6 October 2025</a:t>
+              <a:t>18 February 2026</a:t>
             </a:fld>
             <a:endParaRPr lang="en-US"/>
           </a:p>
@@ -2937,7 +3535,7 @@
     <p:bg>
       <p:bgPr>
         <a:blipFill dpi="0" rotWithShape="1">
-          <a:blip r:embed="rId14">
+          <a:blip r:embed="rId15">
             <a:lum/>
           </a:blip>
           <a:srcRect/>
@@ -3110,7 +3708,7 @@
           <a:p>
             <a:fld id="{C1B28D5F-B017-3B47-9775-DA319F6143FF}" type="datetime3">
               <a:rPr lang="en-IE" smtClean="0"/>
-              <a:t>6 October 2025</a:t>
+              <a:t>18 February 2026</a:t>
             </a:fld>
             <a:endParaRPr lang="en-US" dirty="0"/>
           </a:p>
@@ -3230,6 +3828,7 @@
     <p:sldLayoutId id="2147483664" r:id="rId10"/>
     <p:sldLayoutId id="2147483665" r:id="rId11"/>
     <p:sldLayoutId id="2147483666" r:id="rId12"/>
+    <p:sldLayoutId id="2147483667" r:id="rId13"/>
   </p:sldLayoutIdLst>
   <p:hf sldNum="0" hdr="0" ftr="0"/>
   <p:txStyles>
@@ -3613,8 +4212,18 @@
           <a:lstStyle/>
           <a:p>
             <a:r>
-              <a:t>Summary of Epoch 1</a:t>
-            </a:r>
+              <a:rPr lang="en-IE" dirty="0"/>
+              <a:t>Now perform </a:t>
+            </a:r>
+            <a:r>
+              <a:rPr lang="en-IE" dirty="0" err="1"/>
+              <a:t>ba</a:t>
+            </a:r>
+            <a:r>
+              <a:rPr dirty="0" err="1"/>
+              <a:t>ckpropagation</a:t>
+            </a:r>
+            <a:endParaRPr dirty="0"/>
           </a:p>
         </p:txBody>
       </p:sp>
@@ -3635,25 +4244,25 @@
           <a:p>
             <a:r>
               <a:rPr dirty="0"/>
-              <a:t>Forward pass completed with initialized weights.</a:t>
+              <a:t>Compute error at the output layer</a:t>
             </a:r>
           </a:p>
           <a:p>
             <a:r>
               <a:rPr dirty="0"/>
-              <a:t>Loss computed from output prediction.</a:t>
+              <a:t>Adjust output weights to reduce the error</a:t>
             </a:r>
           </a:p>
           <a:p>
             <a:r>
               <a:rPr dirty="0"/>
-              <a:t>Backward pass adjusted weights toward target.</a:t>
+              <a:t>Propagate error backward to hidden layer</a:t>
             </a:r>
           </a:p>
           <a:p>
             <a:r>
               <a:rPr dirty="0"/>
-              <a:t>Epoch 1 results in noticeable parameter changes.</a:t>
+              <a:t>Weights are updated to reduce future errors</a:t>
             </a:r>
           </a:p>
         </p:txBody>
@@ -3663,7 +4272,7 @@
           <p:cNvPr id="4" name="Slide Number Placeholder 3">
             <a:extLst>
               <a:ext uri="{FF2B5EF4-FFF2-40B4-BE49-F238E27FC236}">
-                <a16:creationId xmlns:a16="http://schemas.microsoft.com/office/drawing/2014/main" id="{CA5393E1-7D58-1AFF-A718-BFDEAE37F0AD}"/>
+                <a16:creationId xmlns:a16="http://schemas.microsoft.com/office/drawing/2014/main" id="{438CBD1D-2B62-76C5-3E79-43A22F49C3E5}"/>
               </a:ext>
             </a:extLst>
           </p:cNvPr>
@@ -3700,7 +4309,13 @@
   <p:cSld>
     <p:spTree>
       <p:nvGrpSpPr>
-        <p:cNvPr id="1" name=""/>
+        <p:cNvPr id="1" name="">
+          <a:extLst>
+            <a:ext uri="{FF2B5EF4-FFF2-40B4-BE49-F238E27FC236}">
+              <a16:creationId xmlns:a16="http://schemas.microsoft.com/office/drawing/2014/main" id="{A221DDD3-A497-319C-C5EA-CBF2F66D878F}"/>
+            </a:ext>
+          </a:extLst>
+        </p:cNvPr>
         <p:cNvGrpSpPr/>
         <p:nvPr/>
       </p:nvGrpSpPr>
@@ -3714,7 +4329,13 @@
       </p:grpSpPr>
       <p:sp>
         <p:nvSpPr>
-          <p:cNvPr id="2" name="Title 1"/>
+          <p:cNvPr id="2" name="Title 1">
+            <a:extLst>
+              <a:ext uri="{FF2B5EF4-FFF2-40B4-BE49-F238E27FC236}">
+                <a16:creationId xmlns:a16="http://schemas.microsoft.com/office/drawing/2014/main" id="{CF62EB35-771B-A3E4-44B3-D3BFB7E1A676}"/>
+              </a:ext>
+            </a:extLst>
+          </p:cNvPr>
           <p:cNvSpPr>
             <a:spLocks noGrp="1"/>
           </p:cNvSpPr>
@@ -3728,14 +4349,22 @@
           <a:lstStyle/>
           <a:p>
             <a:r>
-              <a:t>Epoch 2 – Forward Again</a:t>
-            </a:r>
+              <a:rPr lang="en-IE" dirty="0"/>
+              <a:t>Overall algorithm</a:t>
+            </a:r>
+            <a:endParaRPr dirty="0"/>
           </a:p>
         </p:txBody>
       </p:sp>
       <p:sp>
         <p:nvSpPr>
-          <p:cNvPr id="3" name="Content Placeholder 2"/>
+          <p:cNvPr id="3" name="Content Placeholder 2">
+            <a:extLst>
+              <a:ext uri="{FF2B5EF4-FFF2-40B4-BE49-F238E27FC236}">
+                <a16:creationId xmlns:a16="http://schemas.microsoft.com/office/drawing/2014/main" id="{D711FC48-C9ED-EB6D-32DB-DD72A1427971}"/>
+              </a:ext>
+            </a:extLst>
+          </p:cNvPr>
           <p:cNvSpPr>
             <a:spLocks noGrp="1"/>
           </p:cNvSpPr>
@@ -3743,61 +4372,188 @@
             <p:ph idx="1"/>
           </p:nvPr>
         </p:nvSpPr>
-        <p:spPr/>
+        <p:spPr>
+          <a:xfrm>
+            <a:off x="838199" y="1825625"/>
+            <a:ext cx="9932469" cy="4149290"/>
+          </a:xfrm>
+        </p:spPr>
         <p:txBody>
-          <a:bodyPr/>
+          <a:bodyPr>
+            <a:normAutofit lnSpcReduction="10000"/>
+          </a:bodyPr>
           <a:lstStyle/>
           <a:p>
-            <a:r>
-              <a:rPr dirty="0"/>
-              <a:t>Run forward pass with updated weights.</a:t>
-            </a:r>
-          </a:p>
-          <a:p>
-            <a:r>
-              <a:rPr dirty="0"/>
-              <a:t>Compute new hidden activations and output.</a:t>
-            </a:r>
-          </a:p>
-          <a:p>
-            <a:r>
-              <a:rPr dirty="0"/>
-              <a:t>Expect output closer to target = 1.</a:t>
-            </a:r>
-          </a:p>
-          <a:p>
-            <a:r>
-              <a:rPr dirty="0" err="1"/>
-              <a:t>ReLU</a:t>
-            </a:r>
-            <a:r>
-              <a:rPr dirty="0"/>
-              <a:t> and Sigmoid continue to </a:t>
-            </a:r>
-            <a:r>
-              <a:rPr lang="en-IE" dirty="0"/>
-              <a:t>change</a:t>
-            </a:r>
-            <a:r>
-              <a:rPr dirty="0"/>
-              <a:t> values.</a:t>
-            </a:r>
-            <a:endParaRPr lang="en-IE" dirty="0"/>
-          </a:p>
-          <a:p>
-            <a:r>
-              <a:rPr lang="en-IE" dirty="0">
+            <a:pPr marL="342900" indent="-342900">
+              <a:buAutoNum type="arabicPeriod"/>
+              <a:defRPr sz="1400">
+                <a:latin typeface="Courier New"/>
+              </a:defRPr>
+            </a:pPr>
+            <a:r>
+              <a:rPr lang="cy-GB" sz="1600" b="1" dirty="0"/>
+              <a:t>Initialize</a:t>
+            </a:r>
+            <a:r>
+              <a:rPr lang="cy-GB" sz="1600" dirty="0"/>
+              <a:t> all weights and biases (e.g., to 0 or small integers).</a:t>
+            </a:r>
+            <a:br>
+              <a:rPr lang="cy-GB" sz="1600" dirty="0"/>
+            </a:br>
+            <a:r>
+              <a:rPr lang="cy-GB" sz="1600" dirty="0"/>
+              <a:t>2. For each epoch:</a:t>
+            </a:r>
+            <a:br>
+              <a:rPr lang="cy-GB" sz="1600" dirty="0"/>
+            </a:br>
+            <a:r>
+              <a:rPr lang="cy-GB" sz="1600" dirty="0"/>
+              <a:t>   a. </a:t>
+            </a:r>
+            <a:r>
+              <a:rPr lang="cy-GB" sz="1600" b="1" dirty="0"/>
+              <a:t>Forward pass:</a:t>
+            </a:r>
+            <a:br>
+              <a:rPr lang="cy-GB" sz="1600" dirty="0"/>
+            </a:br>
+            <a:r>
+              <a:rPr lang="cy-GB" sz="1600" dirty="0"/>
+              <a:t>      i.  Compute hidden layer pre-activations: z₁ = w₁·x + b₁, z₂ = w₂·x + b₂</a:t>
+            </a:r>
+            <a:br>
+              <a:rPr lang="cy-GB" sz="1600" dirty="0"/>
+            </a:br>
+            <a:r>
+              <a:rPr lang="cy-GB" sz="1600" dirty="0"/>
+              <a:t>      ii. Apply ReLU activation: h₁ = ReLU(z₁), h₂ = ReLU(z₂)</a:t>
+            </a:r>
+            <a:br>
+              <a:rPr lang="cy-GB" sz="1600" dirty="0"/>
+            </a:br>
+            <a:r>
+              <a:rPr lang="cy-GB" sz="1600" dirty="0"/>
+              <a:t>      iii. Compute output layer input: zₒ = wₒ·h + bₒ</a:t>
+            </a:r>
+            <a:br>
+              <a:rPr lang="cy-GB" sz="1600" dirty="0"/>
+            </a:br>
+            <a:r>
+              <a:rPr lang="cy-GB" sz="1600" dirty="0"/>
+              <a:t>      iv. Apply Sigmoid activation to get prediction: ŷ = </a:t>
+            </a:r>
+            <a:r>
+              <a:rPr lang="el-GR" sz="1600" dirty="0"/>
+              <a:t>σ(</a:t>
+            </a:r>
+            <a:r>
+              <a:rPr lang="cy-GB" sz="1600" dirty="0"/>
+              <a:t>zₒ)</a:t>
+            </a:r>
+            <a:br>
+              <a:rPr lang="cy-GB" sz="1600" dirty="0"/>
+            </a:br>
+            <a:r>
+              <a:rPr lang="cy-GB" sz="1600" dirty="0"/>
+              <a:t>   b. </a:t>
+            </a:r>
+            <a:r>
+              <a:rPr lang="cy-GB" sz="1600" b="1" dirty="0"/>
+              <a:t>Compute Loss:</a:t>
+            </a:r>
+            <a:br>
+              <a:rPr lang="cy-GB" sz="1600" b="1" dirty="0"/>
+            </a:br>
+            <a:r>
+              <a:rPr lang="cy-GB" sz="1600" dirty="0"/>
+              <a:t>      i.  Use Binary Cross-Entropy: L = -[y·log(ŷ) + (1−y)·log(1−ŷ)]</a:t>
+            </a:r>
+            <a:br>
+              <a:rPr lang="cy-GB" sz="1600" dirty="0"/>
+            </a:br>
+            <a:r>
+              <a:rPr lang="cy-GB" sz="1600" dirty="0"/>
+              <a:t>   c. </a:t>
+            </a:r>
+            <a:r>
+              <a:rPr lang="cy-GB" sz="1600" b="1" dirty="0"/>
+              <a:t>Backward pass:</a:t>
+            </a:r>
+            <a:br>
+              <a:rPr lang="cy-GB" sz="1600" dirty="0"/>
+            </a:br>
+            <a:r>
+              <a:rPr lang="cy-GB" sz="1600" dirty="0"/>
+              <a:t>      i.  Compute gradient of loss with respect to output weights</a:t>
+            </a:r>
+            <a:br>
+              <a:rPr lang="cy-GB" sz="1600" dirty="0"/>
+            </a:br>
+            <a:r>
+              <a:rPr lang="cy-GB" sz="1600" dirty="0"/>
+              <a:t>      ii. Backpropagate error to hidden weights only if ReLU &gt; 0</a:t>
+            </a:r>
+            <a:br>
+              <a:rPr lang="cy-GB" sz="1600" dirty="0"/>
+            </a:br>
+            <a:r>
+              <a:rPr lang="cy-GB" sz="1600" dirty="0"/>
+              <a:t>   d. </a:t>
+            </a:r>
+            <a:r>
+              <a:rPr lang="cy-GB" sz="1600" b="1" dirty="0"/>
+              <a:t>Update parameters:</a:t>
+            </a:r>
+            <a:br>
+              <a:rPr lang="cy-GB" sz="1600" dirty="0"/>
+            </a:br>
+            <a:r>
+              <a:rPr lang="cy-GB" sz="1600" dirty="0"/>
+              <a:t>      i.  Adjust weights and biases with gradient steps</a:t>
+            </a:r>
+            <a:br>
+              <a:rPr lang="cy-GB" sz="1600" dirty="0"/>
+            </a:br>
+            <a:r>
+              <a:rPr lang="cy-GB" sz="1600" dirty="0"/>
+              <a:t>      ii. Stop after desired number of epochs</a:t>
+            </a:r>
+          </a:p>
+          <a:p>
+            <a:pPr marL="342900" indent="-342900">
+              <a:buAutoNum type="arabicPeriod"/>
+              <a:defRPr sz="1400">
+                <a:latin typeface="Courier New"/>
+              </a:defRPr>
+            </a:pPr>
+            <a:endParaRPr lang="cy-GB" sz="1600" dirty="0"/>
+          </a:p>
+          <a:p>
+            <a:pPr>
+              <a:defRPr sz="1400">
+                <a:latin typeface="Courier New"/>
+              </a:defRPr>
+            </a:pPr>
+            <a:r>
+              <a:rPr lang="en-IE" sz="3200" dirty="0">
                 <a:solidFill>
                   <a:srgbClr val="009749"/>
                 </a:solidFill>
+                <a:latin typeface="+mn-lt"/>
               </a:rPr>
-              <a:t>Go through epoch 2 on the board.</a:t>
-            </a:r>
-            <a:endParaRPr dirty="0">
-              <a:solidFill>
-                <a:srgbClr val="009749"/>
-              </a:solidFill>
-            </a:endParaRPr>
+              <a:t>On the board: go through all the steps!</a:t>
+            </a:r>
+          </a:p>
+          <a:p>
+            <a:pPr marL="342900" indent="-342900">
+              <a:buAutoNum type="arabicPeriod"/>
+              <a:defRPr sz="1400">
+                <a:latin typeface="Courier New"/>
+              </a:defRPr>
+            </a:pPr>
+            <a:endParaRPr lang="cy-GB" sz="1600" dirty="0"/>
           </a:p>
         </p:txBody>
       </p:sp>
@@ -3806,7 +4562,7 @@
           <p:cNvPr id="4" name="Slide Number Placeholder 3">
             <a:extLst>
               <a:ext uri="{FF2B5EF4-FFF2-40B4-BE49-F238E27FC236}">
-                <a16:creationId xmlns:a16="http://schemas.microsoft.com/office/drawing/2014/main" id="{FC36B4C2-EA69-BED9-D394-29C8ADA1CE64}"/>
+                <a16:creationId xmlns:a16="http://schemas.microsoft.com/office/drawing/2014/main" id="{E20E9D86-5815-12FA-A1E7-B6086B52F597}"/>
               </a:ext>
             </a:extLst>
           </p:cNvPr>
@@ -3831,6 +4587,11 @@
         </p:txBody>
       </p:sp>
     </p:spTree>
+    <p:extLst>
+      <p:ext uri="{BB962C8B-B14F-4D97-AF65-F5344CB8AC3E}">
+        <p14:creationId xmlns:p14="http://schemas.microsoft.com/office/powerpoint/2010/main" val="1675298222"/>
+      </p:ext>
+    </p:extLst>
   </p:cSld>
   <p:clrMapOvr>
     <a:masterClrMapping/>
@@ -3871,7 +4632,7 @@
           <a:lstStyle/>
           <a:p>
             <a:r>
-              <a:t>Summary of Epoch 2</a:t>
+              <a:t>Summary of Epoch 1</a:t>
             </a:r>
           </a:p>
         </p:txBody>
@@ -3893,25 +4654,33 @@
           <a:p>
             <a:r>
               <a:rPr dirty="0"/>
-              <a:t>Output moved closer to 1.</a:t>
+              <a:t>Forward pass completed with initialized weights</a:t>
             </a:r>
           </a:p>
           <a:p>
             <a:r>
               <a:rPr dirty="0"/>
-              <a:t>Loss dropped compared to Epoch 1.</a:t>
+              <a:t>Loss computed from output prediction</a:t>
             </a:r>
           </a:p>
           <a:p>
             <a:r>
               <a:rPr dirty="0"/>
-              <a:t>Learning rate was effective.</a:t>
-            </a:r>
-          </a:p>
-          <a:p>
+              <a:t>Backward pass adjusted weights toward target</a:t>
+            </a:r>
+          </a:p>
+          <a:p>
+            <a:r>
+              <a:rPr lang="en-IE" dirty="0"/>
+              <a:t>R</a:t>
+            </a:r>
+            <a:r>
+              <a:rPr dirty="0" err="1"/>
+              <a:t>esults</a:t>
+            </a:r>
             <a:r>
               <a:rPr dirty="0"/>
-              <a:t>Track all parameter values again.</a:t>
+              <a:t> in noticeable parameter changes</a:t>
             </a:r>
           </a:p>
         </p:txBody>
@@ -3921,7 +4690,7 @@
           <p:cNvPr id="4" name="Slide Number Placeholder 3">
             <a:extLst>
               <a:ext uri="{FF2B5EF4-FFF2-40B4-BE49-F238E27FC236}">
-                <a16:creationId xmlns:a16="http://schemas.microsoft.com/office/drawing/2014/main" id="{7EF7F5F1-4A8F-4E77-13FB-749F18DBE95F}"/>
+                <a16:creationId xmlns:a16="http://schemas.microsoft.com/office/drawing/2014/main" id="{CA5393E1-7D58-1AFF-A718-BFDEAE37F0AD}"/>
               </a:ext>
             </a:extLst>
           </p:cNvPr>
@@ -3986,7 +4755,7 @@
           <a:lstStyle/>
           <a:p>
             <a:r>
-              <a:t>Compare Epochs – Learning Trace</a:t>
+              <a:t>Epoch 2 – Forward Again</a:t>
             </a:r>
           </a:p>
         </p:txBody>
@@ -4007,64 +4776,55 @@
           <a:lstStyle/>
           <a:p>
             <a:r>
+              <a:rPr dirty="0"/>
+              <a:t>Run forward pass with updated weights</a:t>
+            </a:r>
+          </a:p>
+          <a:p>
+            <a:r>
+              <a:rPr dirty="0"/>
+              <a:t>Compute new hidden activations and output</a:t>
+            </a:r>
+          </a:p>
+          <a:p>
+            <a:r>
+              <a:rPr dirty="0"/>
+              <a:t>Expect output closer to target = 1</a:t>
+            </a:r>
+          </a:p>
+          <a:p>
+            <a:r>
+              <a:rPr dirty="0" err="1"/>
+              <a:t>ReLU</a:t>
+            </a:r>
+            <a:r>
+              <a:rPr dirty="0"/>
+              <a:t> and Sigmoid continue to </a:t>
+            </a:r>
+            <a:r>
               <a:rPr lang="en-IE" dirty="0"/>
-              <a:t>Usually we display outputs of loss function over epochs</a:t>
-            </a:r>
-            <a:endParaRPr dirty="0"/>
-          </a:p>
-          <a:p>
-            <a:r>
-              <a:rPr lang="en-IE" dirty="0"/>
-              <a:t>Can also s</a:t>
+              <a:t>change</a:t>
             </a:r>
             <a:r>
               <a:rPr dirty="0"/>
-              <a:t>how weight evolution side-by-side.</a:t>
-            </a:r>
-          </a:p>
-          <a:p>
-            <a:r>
-              <a:rPr lang="en-IE" dirty="0"/>
-              <a:t>B</a:t>
-            </a:r>
-            <a:r>
-              <a:rPr dirty="0" err="1"/>
-              <a:t>iggest</a:t>
-            </a:r>
-            <a:r>
-              <a:rPr dirty="0"/>
-              <a:t> changes </a:t>
-            </a:r>
-            <a:r>
-              <a:rPr lang="en-IE" dirty="0"/>
-              <a:t>usually </a:t>
-            </a:r>
-            <a:r>
-              <a:rPr dirty="0"/>
-              <a:t>in early epochs.</a:t>
-            </a:r>
-          </a:p>
-          <a:p>
-            <a:r>
-              <a:rPr dirty="0"/>
-              <a:t>Later epochs just refine the pattern.</a:t>
+              <a:t> values</a:t>
             </a:r>
             <a:endParaRPr lang="en-IE" dirty="0"/>
           </a:p>
           <a:p>
             <a:r>
-              <a:rPr lang="en-IE" dirty="0"/>
-              <a:t>(</a:t>
-            </a:r>
-            <a:r>
-              <a:rPr lang="en-IE" dirty="0" err="1"/>
-              <a:t>wandb</a:t>
-            </a:r>
-            <a:r>
-              <a:rPr lang="en-IE" dirty="0"/>
-              <a:t> package useful for monitoring runs)</a:t>
-            </a:r>
-            <a:endParaRPr dirty="0"/>
+              <a:rPr lang="en-IE" dirty="0">
+                <a:solidFill>
+                  <a:srgbClr val="009749"/>
+                </a:solidFill>
+              </a:rPr>
+              <a:t>Go through epoch 2 on the board</a:t>
+            </a:r>
+            <a:endParaRPr dirty="0">
+              <a:solidFill>
+                <a:srgbClr val="009749"/>
+              </a:solidFill>
+            </a:endParaRPr>
           </a:p>
         </p:txBody>
       </p:sp>
@@ -4073,7 +4833,7 @@
           <p:cNvPr id="4" name="Slide Number Placeholder 3">
             <a:extLst>
               <a:ext uri="{FF2B5EF4-FFF2-40B4-BE49-F238E27FC236}">
-                <a16:creationId xmlns:a16="http://schemas.microsoft.com/office/drawing/2014/main" id="{39C46D8C-6F76-A797-6356-EC6C4978F02D}"/>
+                <a16:creationId xmlns:a16="http://schemas.microsoft.com/office/drawing/2014/main" id="{FC36B4C2-EA69-BED9-D394-29C8ADA1CE64}"/>
               </a:ext>
             </a:extLst>
           </p:cNvPr>
@@ -4138,128 +4898,57 @@
           <a:lstStyle/>
           <a:p>
             <a:r>
-              <a:t>Summary – What the Network Learned</a:t>
+              <a:t>Summary of Epoch 2</a:t>
             </a:r>
           </a:p>
         </p:txBody>
       </p:sp>
-      <mc:AlternateContent xmlns:mc="http://schemas.openxmlformats.org/markup-compatibility/2006" xmlns:a14="http://schemas.microsoft.com/office/drawing/2010/main">
-        <mc:Choice Requires="a14">
-          <p:sp>
-            <p:nvSpPr>
-              <p:cNvPr id="3" name="Content Placeholder 2"/>
-              <p:cNvSpPr>
-                <a:spLocks noGrp="1"/>
-              </p:cNvSpPr>
-              <p:nvPr>
-                <p:ph idx="1"/>
-              </p:nvPr>
-            </p:nvSpPr>
-            <p:spPr/>
-            <p:txBody>
-              <a:bodyPr/>
-              <a:lstStyle/>
-              <a:p>
-                <a:r>
-                  <a:rPr lang="en-IE" dirty="0"/>
-                  <a:t>Hidden neuron 1 became active for [1,0,1].</a:t>
-                </a:r>
-              </a:p>
-              <a:p>
-                <a:r>
-                  <a:rPr lang="en-IE" dirty="0"/>
-                  <a:t>Its weights increased to drive output up.</a:t>
-                </a:r>
-              </a:p>
-              <a:p>
-                <a:r>
-                  <a:rPr lang="en-IE" dirty="0"/>
-                  <a:t>Output weights were tuned to emphasize </a:t>
-                </a:r>
-                <a14:m>
-                  <m:oMath xmlns:m="http://schemas.openxmlformats.org/officeDocument/2006/math">
-                    <m:sSub>
-                      <m:sSubPr>
-                        <m:ctrlPr>
-                          <a:rPr lang="en-IE" b="0" i="1" dirty="0" smtClean="0">
-                            <a:latin typeface="Cambria Math" panose="02040503050406030204" pitchFamily="18" charset="0"/>
-                          </a:rPr>
-                        </m:ctrlPr>
-                      </m:sSubPr>
-                      <m:e>
-                        <m:r>
-                          <a:rPr lang="en-IE" i="1" dirty="0" smtClean="0">
-                            <a:latin typeface="Cambria Math" panose="02040503050406030204" pitchFamily="18" charset="0"/>
-                          </a:rPr>
-                          <m:t>h</m:t>
-                        </m:r>
-                      </m:e>
-                      <m:sub>
-                        <m:r>
-                          <a:rPr lang="en-IE" i="1" dirty="0" smtClean="0">
-                            <a:latin typeface="Cambria Math" panose="02040503050406030204" pitchFamily="18" charset="0"/>
-                          </a:rPr>
-                          <m:t>1</m:t>
-                        </m:r>
-                      </m:sub>
-                    </m:sSub>
-                  </m:oMath>
-                </a14:m>
-                <a:r>
-                  <a:rPr lang="en-IE" dirty="0"/>
-                  <a:t>.</a:t>
-                </a:r>
-              </a:p>
-              <a:p>
-                <a:r>
-                  <a:rPr lang="en-IE" dirty="0"/>
-                  <a:t>Biases adjusted to support activation.</a:t>
-                </a:r>
-                <a:endParaRPr dirty="0"/>
-              </a:p>
-            </p:txBody>
-          </p:sp>
-        </mc:Choice>
-        <mc:Fallback xmlns="">
-          <p:sp>
-            <p:nvSpPr>
-              <p:cNvPr id="3" name="Content Placeholder 2"/>
-              <p:cNvSpPr>
-                <a:spLocks noGrp="1" noRot="1" noChangeAspect="1" noMove="1" noResize="1" noEditPoints="1" noAdjustHandles="1" noChangeArrowheads="1" noChangeShapeType="1" noTextEdit="1"/>
-              </p:cNvSpPr>
-              <p:nvPr>
-                <p:ph idx="1"/>
-              </p:nvPr>
-            </p:nvSpPr>
-            <p:spPr>
-              <a:blipFill>
-                <a:blip r:embed="rId2"/>
-                <a:stretch>
-                  <a:fillRect l="-1086" t="-2326"/>
-                </a:stretch>
-              </a:blipFill>
-            </p:spPr>
-            <p:txBody>
-              <a:bodyPr/>
-              <a:lstStyle/>
-              <a:p>
-                <a:r>
-                  <a:rPr lang="en-US">
-                    <a:noFill/>
-                  </a:rPr>
-                  <a:t> </a:t>
-                </a:r>
-              </a:p>
-            </p:txBody>
-          </p:sp>
-        </mc:Fallback>
-      </mc:AlternateContent>
+      <p:sp>
+        <p:nvSpPr>
+          <p:cNvPr id="3" name="Content Placeholder 2"/>
+          <p:cNvSpPr>
+            <a:spLocks noGrp="1"/>
+          </p:cNvSpPr>
+          <p:nvPr>
+            <p:ph idx="1"/>
+          </p:nvPr>
+        </p:nvSpPr>
+        <p:spPr/>
+        <p:txBody>
+          <a:bodyPr/>
+          <a:lstStyle/>
+          <a:p>
+            <a:r>
+              <a:rPr dirty="0"/>
+              <a:t>Output moved closer to 1</a:t>
+            </a:r>
+          </a:p>
+          <a:p>
+            <a:r>
+              <a:rPr dirty="0"/>
+              <a:t>Loss dropped compared to Epoch 1</a:t>
+            </a:r>
+          </a:p>
+          <a:p>
+            <a:r>
+              <a:rPr dirty="0"/>
+              <a:t>Learning rate was effective</a:t>
+            </a:r>
+          </a:p>
+          <a:p>
+            <a:r>
+              <a:rPr dirty="0"/>
+              <a:t>Track all parameter values again</a:t>
+            </a:r>
+          </a:p>
+        </p:txBody>
+      </p:sp>
       <p:sp>
         <p:nvSpPr>
           <p:cNvPr id="4" name="Slide Number Placeholder 3">
             <a:extLst>
               <a:ext uri="{FF2B5EF4-FFF2-40B4-BE49-F238E27FC236}">
-                <a16:creationId xmlns:a16="http://schemas.microsoft.com/office/drawing/2014/main" id="{CF46E8C7-BF5E-A6CB-7923-6D53DB1B8C35}"/>
+                <a16:creationId xmlns:a16="http://schemas.microsoft.com/office/drawing/2014/main" id="{7EF7F5F1-4A8F-4E77-13FB-749F18DBE95F}"/>
               </a:ext>
             </a:extLst>
           </p:cNvPr>
@@ -4324,7 +5013,7 @@
           <a:lstStyle/>
           <a:p>
             <a:r>
-              <a:t>Common Mistakes (By Hand and Code)</a:t>
+              <a:t>Compare Epochs – Learning Trace</a:t>
             </a:r>
           </a:p>
         </p:txBody>
@@ -4345,31 +5034,67 @@
           <a:lstStyle/>
           <a:p>
             <a:r>
+              <a:rPr lang="en-IE" dirty="0"/>
+              <a:t>Usually we display outputs of loss function over epochs</a:t>
+            </a:r>
+            <a:endParaRPr dirty="0"/>
+          </a:p>
+          <a:p>
+            <a:r>
+              <a:rPr lang="en-IE" dirty="0"/>
+              <a:t>Can also s</a:t>
+            </a:r>
+            <a:r>
               <a:rPr dirty="0"/>
-              <a:t>Forgetting to apply bias before activation.</a:t>
-            </a:r>
-          </a:p>
-          <a:p>
+              <a:t>how weight evolution side-by-side</a:t>
+            </a:r>
+          </a:p>
+          <a:p>
+            <a:r>
+              <a:rPr lang="en-IE" dirty="0"/>
+              <a:t>B</a:t>
+            </a:r>
+            <a:r>
+              <a:rPr dirty="0" err="1"/>
+              <a:t>iggest</a:t>
+            </a:r>
             <a:r>
               <a:rPr dirty="0"/>
-              <a:t>Mislabeling the sign of gradient updates.</a:t>
-            </a:r>
-          </a:p>
-          <a:p>
+              <a:t> changes </a:t>
+            </a:r>
+            <a:r>
+              <a:rPr lang="en-IE" dirty="0"/>
+              <a:t>usually </a:t>
+            </a:r>
             <a:r>
               <a:rPr dirty="0"/>
-              <a:t>Applying activation at wrong stage.</a:t>
-            </a:r>
-          </a:p>
-          <a:p>
-            <a:r>
-              <a:rPr dirty="0" err="1"/>
-              <a:t>ReLU</a:t>
-            </a:r>
+              <a:t>in early epochs</a:t>
+            </a:r>
+          </a:p>
+          <a:p>
             <a:r>
               <a:rPr dirty="0"/>
-              <a:t> 'zero-out' not handled correctly.</a:t>
-            </a:r>
+              <a:t>Later epochs just refine the pattern</a:t>
+            </a:r>
+            <a:endParaRPr lang="en-IE" dirty="0"/>
+          </a:p>
+          <a:p>
+            <a:r>
+              <a:rPr lang="en-IE" dirty="0"/>
+              <a:t>(</a:t>
+            </a:r>
+            <a:r>
+              <a:rPr lang="en-IE" dirty="0" err="1">
+                <a:latin typeface="Courier New" panose="02070309020205020404" pitchFamily="49" charset="0"/>
+                <a:cs typeface="Courier New" panose="02070309020205020404" pitchFamily="49" charset="0"/>
+              </a:rPr>
+              <a:t>wandb</a:t>
+            </a:r>
+            <a:r>
+              <a:rPr lang="en-IE" dirty="0"/>
+              <a:t> package useful for monitoring runs)</a:t>
+            </a:r>
+            <a:endParaRPr dirty="0"/>
           </a:p>
         </p:txBody>
       </p:sp>
@@ -4378,7 +5103,7 @@
           <p:cNvPr id="4" name="Slide Number Placeholder 3">
             <a:extLst>
               <a:ext uri="{FF2B5EF4-FFF2-40B4-BE49-F238E27FC236}">
-                <a16:creationId xmlns:a16="http://schemas.microsoft.com/office/drawing/2014/main" id="{18DE7DBF-4153-BEE3-68B1-9CEB810B3E24}"/>
+                <a16:creationId xmlns:a16="http://schemas.microsoft.com/office/drawing/2014/main" id="{39C46D8C-6F76-A797-6356-EC6C4978F02D}"/>
               </a:ext>
             </a:extLst>
           </p:cNvPr>
@@ -4443,86 +5168,131 @@
           <a:lstStyle/>
           <a:p>
             <a:r>
-              <a:t>Practice Suggestions</a:t>
+              <a:t>Summary – What the Network Learned</a:t>
             </a:r>
           </a:p>
         </p:txBody>
       </p:sp>
-      <p:sp>
-        <p:nvSpPr>
-          <p:cNvPr id="3" name="Content Placeholder 2"/>
-          <p:cNvSpPr>
-            <a:spLocks noGrp="1"/>
-          </p:cNvSpPr>
-          <p:nvPr>
-            <p:ph idx="1"/>
-          </p:nvPr>
-        </p:nvSpPr>
-        <p:spPr/>
-        <p:txBody>
-          <a:bodyPr/>
-          <a:lstStyle/>
-          <a:p>
-            <a:r>
-              <a:rPr dirty="0"/>
-              <a:t>Change input: try [0,1,1] or [1,1,1].</a:t>
-            </a:r>
-          </a:p>
-          <a:p>
-            <a:r>
-              <a:rPr dirty="0"/>
-              <a:t>Try </a:t>
-            </a:r>
-            <a:r>
-              <a:rPr lang="en-IE" dirty="0"/>
-              <a:t>other </a:t>
-            </a:r>
-            <a:r>
-              <a:rPr dirty="0"/>
-              <a:t>initial weights and compare convergence.</a:t>
-            </a:r>
-          </a:p>
-          <a:p>
-            <a:r>
-              <a:rPr dirty="0"/>
-              <a:t>Use two training examples</a:t>
-            </a:r>
-            <a:r>
-              <a:rPr lang="en-IE" dirty="0"/>
-              <a:t>.</a:t>
-            </a:r>
-            <a:endParaRPr dirty="0"/>
-          </a:p>
-          <a:p>
-            <a:r>
-              <a:rPr dirty="0"/>
-              <a:t>Try tanh activation instead of </a:t>
-            </a:r>
-            <a:r>
-              <a:rPr dirty="0" err="1"/>
-              <a:t>ReLU</a:t>
-            </a:r>
-            <a:r>
-              <a:rPr dirty="0"/>
-              <a:t>.</a:t>
-            </a:r>
-            <a:endParaRPr lang="en-IE" dirty="0"/>
-          </a:p>
-          <a:p>
-            <a:r>
-              <a:rPr lang="en-IE" dirty="0"/>
-              <a:t>A simpler version to this (with derivatives given) will be on the exam!</a:t>
-            </a:r>
-            <a:endParaRPr dirty="0"/>
-          </a:p>
-        </p:txBody>
-      </p:sp>
+      <mc:AlternateContent xmlns:mc="http://schemas.openxmlformats.org/markup-compatibility/2006">
+        <mc:Choice xmlns:a14="http://schemas.microsoft.com/office/drawing/2010/main" Requires="a14">
+          <p:sp>
+            <p:nvSpPr>
+              <p:cNvPr id="3" name="Content Placeholder 2"/>
+              <p:cNvSpPr>
+                <a:spLocks noGrp="1"/>
+              </p:cNvSpPr>
+              <p:nvPr>
+                <p:ph idx="1"/>
+              </p:nvPr>
+            </p:nvSpPr>
+            <p:spPr/>
+            <p:txBody>
+              <a:bodyPr/>
+              <a:lstStyle/>
+              <a:p>
+                <a:r>
+                  <a:rPr lang="en-IE" dirty="0"/>
+                  <a:t>Hidden neuron 1 became active for [1,0,1]</a:t>
+                </a:r>
+              </a:p>
+              <a:p>
+                <a:r>
+                  <a:rPr lang="en-IE" dirty="0"/>
+                  <a:t>(Thus could ‘feature detect’ an important meteorological aspect of the data)</a:t>
+                </a:r>
+              </a:p>
+              <a:p>
+                <a:r>
+                  <a:rPr lang="en-IE" dirty="0"/>
+                  <a:t>Its weights increased to drive output up</a:t>
+                </a:r>
+              </a:p>
+              <a:p>
+                <a:r>
+                  <a:rPr lang="en-IE" dirty="0"/>
+                  <a:t>Output weights were tuned to emphasize </a:t>
+                </a:r>
+                <a14:m>
+                  <m:oMath xmlns:m="http://schemas.openxmlformats.org/officeDocument/2006/math">
+                    <m:sSub>
+                      <m:sSubPr>
+                        <m:ctrlPr>
+                          <a:rPr lang="en-IE" b="0" i="1" dirty="0" smtClean="0">
+                            <a:latin typeface="Cambria Math" panose="02040503050406030204" pitchFamily="18" charset="0"/>
+                          </a:rPr>
+                        </m:ctrlPr>
+                      </m:sSubPr>
+                      <m:e>
+                        <m:r>
+                          <a:rPr lang="en-IE" i="1" dirty="0" smtClean="0">
+                            <a:latin typeface="Cambria Math" panose="02040503050406030204" pitchFamily="18" charset="0"/>
+                          </a:rPr>
+                          <m:t>h</m:t>
+                        </m:r>
+                      </m:e>
+                      <m:sub>
+                        <m:r>
+                          <a:rPr lang="en-IE" i="1" dirty="0" smtClean="0">
+                            <a:latin typeface="Cambria Math" panose="02040503050406030204" pitchFamily="18" charset="0"/>
+                          </a:rPr>
+                          <m:t>1</m:t>
+                        </m:r>
+                      </m:sub>
+                    </m:sSub>
+                  </m:oMath>
+                </a14:m>
+                <a:endParaRPr lang="en-IE" dirty="0"/>
+              </a:p>
+              <a:p>
+                <a:r>
+                  <a:rPr lang="en-IE" dirty="0"/>
+                  <a:t>Biases adjusted to support activation</a:t>
+                </a:r>
+                <a:endParaRPr dirty="0"/>
+              </a:p>
+            </p:txBody>
+          </p:sp>
+        </mc:Choice>
+        <mc:Fallback>
+          <p:sp>
+            <p:nvSpPr>
+              <p:cNvPr id="3" name="Content Placeholder 2"/>
+              <p:cNvSpPr>
+                <a:spLocks noGrp="1" noRot="1" noChangeAspect="1" noMove="1" noResize="1" noEditPoints="1" noAdjustHandles="1" noChangeArrowheads="1" noChangeShapeType="1" noTextEdit="1"/>
+              </p:cNvSpPr>
+              <p:nvPr>
+                <p:ph idx="1"/>
+              </p:nvPr>
+            </p:nvSpPr>
+            <p:spPr>
+              <a:blipFill>
+                <a:blip r:embed="rId3"/>
+                <a:stretch>
+                  <a:fillRect l="-1368" t="-2439"/>
+                </a:stretch>
+              </a:blipFill>
+            </p:spPr>
+            <p:txBody>
+              <a:bodyPr/>
+              <a:lstStyle/>
+              <a:p>
+                <a:r>
+                  <a:rPr lang="en-US">
+                    <a:noFill/>
+                  </a:rPr>
+                  <a:t> </a:t>
+                </a:r>
+              </a:p>
+            </p:txBody>
+          </p:sp>
+        </mc:Fallback>
+      </mc:AlternateContent>
       <p:sp>
         <p:nvSpPr>
           <p:cNvPr id="4" name="Slide Number Placeholder 3">
             <a:extLst>
               <a:ext uri="{FF2B5EF4-FFF2-40B4-BE49-F238E27FC236}">
-                <a16:creationId xmlns:a16="http://schemas.microsoft.com/office/drawing/2014/main" id="{530CFDDB-24B9-85F1-A0D0-1D0BB45C6990}"/>
+                <a16:creationId xmlns:a16="http://schemas.microsoft.com/office/drawing/2014/main" id="{CF46E8C7-BF5E-A6CB-7923-6D53DB1B8C35}"/>
               </a:ext>
             </a:extLst>
           </p:cNvPr>
@@ -4576,10 +5346,143 @@
           <p:cNvPr id="2" name="Title 1">
             <a:extLst>
               <a:ext uri="{FF2B5EF4-FFF2-40B4-BE49-F238E27FC236}">
-                <a16:creationId xmlns:a16="http://schemas.microsoft.com/office/drawing/2014/main" id="{5052E3C7-E02A-F443-93FF-99B0D12844EC}"/>
+                <a16:creationId xmlns:a16="http://schemas.microsoft.com/office/drawing/2014/main" id="{7DF17741-F36C-B628-E87A-E65B8D291C5F}"/>
               </a:ext>
             </a:extLst>
           </p:cNvPr>
+          <p:cNvSpPr>
+            <a:spLocks noGrp="1"/>
+          </p:cNvSpPr>
+          <p:nvPr>
+            <p:ph type="ctrTitle"/>
+          </p:nvPr>
+        </p:nvSpPr>
+        <p:spPr/>
+        <p:txBody>
+          <a:bodyPr/>
+          <a:lstStyle/>
+          <a:p>
+            <a:endParaRPr lang="en-US"/>
+          </a:p>
+        </p:txBody>
+      </p:sp>
+      <p:sp>
+        <p:nvSpPr>
+          <p:cNvPr id="3" name="Subtitle 2">
+            <a:extLst>
+              <a:ext uri="{FF2B5EF4-FFF2-40B4-BE49-F238E27FC236}">
+                <a16:creationId xmlns:a16="http://schemas.microsoft.com/office/drawing/2014/main" id="{D5ABFB97-8BC2-728D-8943-19B7BFF236D3}"/>
+              </a:ext>
+            </a:extLst>
+          </p:cNvPr>
+          <p:cNvSpPr>
+            <a:spLocks noGrp="1"/>
+          </p:cNvSpPr>
+          <p:nvPr>
+            <p:ph type="subTitle" idx="1"/>
+          </p:nvPr>
+        </p:nvSpPr>
+        <p:spPr/>
+        <p:txBody>
+          <a:bodyPr/>
+          <a:lstStyle/>
+          <a:p>
+            <a:endParaRPr lang="en-US"/>
+          </a:p>
+        </p:txBody>
+      </p:sp>
+      <p:sp>
+        <p:nvSpPr>
+          <p:cNvPr id="4" name="Date Placeholder 3">
+            <a:extLst>
+              <a:ext uri="{FF2B5EF4-FFF2-40B4-BE49-F238E27FC236}">
+                <a16:creationId xmlns:a16="http://schemas.microsoft.com/office/drawing/2014/main" id="{073D7406-55CE-D843-484C-37BCA8CC215E}"/>
+              </a:ext>
+            </a:extLst>
+          </p:cNvPr>
+          <p:cNvSpPr>
+            <a:spLocks noGrp="1"/>
+          </p:cNvSpPr>
+          <p:nvPr>
+            <p:ph type="dt" sz="half" idx="10"/>
+          </p:nvPr>
+        </p:nvSpPr>
+        <p:spPr/>
+        <p:txBody>
+          <a:bodyPr/>
+          <a:lstStyle/>
+          <a:p>
+            <a:fld id="{C1B28D5F-B017-3B47-9775-DA319F6143FF}" type="datetime3">
+              <a:rPr lang="en-IE" smtClean="0"/>
+              <a:t>18 February 2026</a:t>
+            </a:fld>
+            <a:endParaRPr lang="en-US" dirty="0"/>
+          </a:p>
+        </p:txBody>
+      </p:sp>
+      <p:pic>
+        <p:nvPicPr>
+          <p:cNvPr id="6" name="slide.url=https://www.polleverywhere.com/clickable_images/yRk7j8s6JV63O3Z1SD3Is">
+            <a:extLst>
+              <a:ext uri="{FF2B5EF4-FFF2-40B4-BE49-F238E27FC236}">
+                <a16:creationId xmlns:a16="http://schemas.microsoft.com/office/drawing/2014/main" id="{B248AB35-E723-3F1F-6839-3A5E48980FCD}"/>
+              </a:ext>
+            </a:extLst>
+          </p:cNvPr>
+          <p:cNvPicPr>
+            <a:picLocks/>
+          </p:cNvPicPr>
+          <p:nvPr/>
+        </p:nvPicPr>
+        <p:blipFill>
+          <a:blip r:embed="rId3"/>
+          <a:stretch>
+            <a:fillRect/>
+          </a:stretch>
+        </p:blipFill>
+        <p:spPr>
+          <a:xfrm>
+            <a:off x="63500" y="63500"/>
+            <a:ext cx="12065000" cy="6731000"/>
+          </a:xfrm>
+          <a:prstGeom prst="rect">
+            <a:avLst/>
+          </a:prstGeom>
+        </p:spPr>
+      </p:pic>
+    </p:spTree>
+    <p:extLst>
+      <p:ext uri="{BB962C8B-B14F-4D97-AF65-F5344CB8AC3E}">
+        <p14:creationId xmlns:p14="http://schemas.microsoft.com/office/powerpoint/2010/main" val="1369713162"/>
+      </p:ext>
+    </p:extLst>
+  </p:cSld>
+  <p:clrMapOvr>
+    <a:masterClrMapping/>
+  </p:clrMapOvr>
+</p:sld>
+</file>
+
+<file path=ppt/slides/slide18.xml><?xml version="1.0" encoding="utf-8"?>
+<p:sld xmlns:a="http://schemas.openxmlformats.org/drawingml/2006/main" xmlns:r="http://schemas.openxmlformats.org/officeDocument/2006/relationships" xmlns:p="http://schemas.openxmlformats.org/presentationml/2006/main">
+  <p:cSld>
+    <p:spTree>
+      <p:nvGrpSpPr>
+        <p:cNvPr id="1" name=""/>
+        <p:cNvGrpSpPr/>
+        <p:nvPr/>
+      </p:nvGrpSpPr>
+      <p:grpSpPr>
+        <a:xfrm>
+          <a:off x="0" y="0"/>
+          <a:ext cx="0" cy="0"/>
+          <a:chOff x="0" y="0"/>
+          <a:chExt cx="0" cy="0"/>
+        </a:xfrm>
+      </p:grpSpPr>
+      <p:sp>
+        <p:nvSpPr>
+          <p:cNvPr id="2" name="Title 1"/>
           <p:cNvSpPr>
             <a:spLocks noGrp="1"/>
           </p:cNvSpPr>
@@ -4593,21 +5496,15 @@
           <a:lstStyle/>
           <a:p>
             <a:r>
-              <a:rPr lang="en-US" dirty="0"/>
-              <a:t>Summary</a:t>
+              <a:rPr dirty="0"/>
+              <a:t>Common Mistakes</a:t>
             </a:r>
           </a:p>
         </p:txBody>
       </p:sp>
       <p:sp>
         <p:nvSpPr>
-          <p:cNvPr id="3" name="Content Placeholder 2">
-            <a:extLst>
-              <a:ext uri="{FF2B5EF4-FFF2-40B4-BE49-F238E27FC236}">
-                <a16:creationId xmlns:a16="http://schemas.microsoft.com/office/drawing/2014/main" id="{92B1495C-38DD-F9F0-478E-D16C6E4C61EA}"/>
-              </a:ext>
-            </a:extLst>
-          </p:cNvPr>
+          <p:cNvPr id="3" name="Content Placeholder 2"/>
           <p:cNvSpPr>
             <a:spLocks noGrp="1"/>
           </p:cNvSpPr>
@@ -4620,43 +5517,200 @@
           <a:bodyPr/>
           <a:lstStyle/>
           <a:p>
-            <a:pPr marL="457200" indent="-457200">
-              <a:buFont typeface="Arial" panose="020B0604020202020204" pitchFamily="34" charset="0"/>
-              <a:buChar char="•"/>
-            </a:pPr>
-            <a:r>
-              <a:rPr lang="en-US" dirty="0"/>
-              <a:t>It’s a lot of work (and fiddly calculation) to go through a full forward and backward pass of even a simple NN</a:t>
-            </a:r>
-          </a:p>
-          <a:p>
-            <a:pPr marL="457200" indent="-457200">
-              <a:buFont typeface="Arial" panose="020B0604020202020204" pitchFamily="34" charset="0"/>
-              <a:buChar char="•"/>
-            </a:pPr>
-            <a:r>
-              <a:rPr lang="en-US" dirty="0"/>
-              <a:t>All the calculations though are pretty straightforward</a:t>
-            </a:r>
-          </a:p>
-          <a:p>
-            <a:pPr marL="457200" indent="-457200">
-              <a:buFont typeface="Arial" panose="020B0604020202020204" pitchFamily="34" charset="0"/>
-              <a:buChar char="•"/>
-            </a:pPr>
-            <a:r>
-              <a:rPr lang="en-US" dirty="0"/>
-              <a:t>Easy to make small mistakes. Marks given for process not accuracy</a:t>
-            </a:r>
+            <a:r>
+              <a:rPr dirty="0"/>
+              <a:t>Forgetting to apply bias before activation</a:t>
+            </a:r>
+          </a:p>
+          <a:p>
+            <a:r>
+              <a:rPr dirty="0"/>
+              <a:t>Mislabeling the sign of gradient updates</a:t>
+            </a:r>
+          </a:p>
+          <a:p>
+            <a:r>
+              <a:rPr dirty="0"/>
+              <a:t>Applying activation at wrong stage</a:t>
+            </a:r>
+          </a:p>
+          <a:p>
+            <a:r>
+              <a:rPr dirty="0" err="1"/>
+              <a:t>ReLU</a:t>
+            </a:r>
+            <a:r>
+              <a:rPr dirty="0"/>
+              <a:t> 'zero-out' not handled correctly</a:t>
+            </a:r>
+          </a:p>
+        </p:txBody>
+      </p:sp>
+      <p:sp>
+        <p:nvSpPr>
+          <p:cNvPr id="4" name="Slide Number Placeholder 3">
+            <a:extLst>
+              <a:ext uri="{FF2B5EF4-FFF2-40B4-BE49-F238E27FC236}">
+                <a16:creationId xmlns:a16="http://schemas.microsoft.com/office/drawing/2014/main" id="{18DE7DBF-4153-BEE3-68B1-9CEB810B3E24}"/>
+              </a:ext>
+            </a:extLst>
+          </p:cNvPr>
+          <p:cNvSpPr>
+            <a:spLocks noGrp="1"/>
+          </p:cNvSpPr>
+          <p:nvPr>
+            <p:ph type="sldNum" sz="quarter" idx="12"/>
+          </p:nvPr>
+        </p:nvSpPr>
+        <p:spPr/>
+        <p:txBody>
+          <a:bodyPr/>
+          <a:lstStyle/>
+          <a:p>
+            <a:fld id="{8E65201D-48DB-3B45-ABC2-018B1E66F34C}" type="slidenum">
+              <a:rPr lang="en-US" smtClean="0"/>
+              <a:t>18</a:t>
+            </a:fld>
+            <a:endParaRPr lang="en-US"/>
           </a:p>
         </p:txBody>
       </p:sp>
     </p:spTree>
-    <p:extLst>
-      <p:ext uri="{BB962C8B-B14F-4D97-AF65-F5344CB8AC3E}">
-        <p14:creationId xmlns:p14="http://schemas.microsoft.com/office/powerpoint/2010/main" val="2902375257"/>
-      </p:ext>
-    </p:extLst>
+  </p:cSld>
+  <p:clrMapOvr>
+    <a:masterClrMapping/>
+  </p:clrMapOvr>
+</p:sld>
+</file>
+
+<file path=ppt/slides/slide19.xml><?xml version="1.0" encoding="utf-8"?>
+<p:sld xmlns:a="http://schemas.openxmlformats.org/drawingml/2006/main" xmlns:r="http://schemas.openxmlformats.org/officeDocument/2006/relationships" xmlns:p="http://schemas.openxmlformats.org/presentationml/2006/main">
+  <p:cSld>
+    <p:spTree>
+      <p:nvGrpSpPr>
+        <p:cNvPr id="1" name=""/>
+        <p:cNvGrpSpPr/>
+        <p:nvPr/>
+      </p:nvGrpSpPr>
+      <p:grpSpPr>
+        <a:xfrm>
+          <a:off x="0" y="0"/>
+          <a:ext cx="0" cy="0"/>
+          <a:chOff x="0" y="0"/>
+          <a:chExt cx="0" cy="0"/>
+        </a:xfrm>
+      </p:grpSpPr>
+      <p:sp>
+        <p:nvSpPr>
+          <p:cNvPr id="2" name="Title 1"/>
+          <p:cNvSpPr>
+            <a:spLocks noGrp="1"/>
+          </p:cNvSpPr>
+          <p:nvPr>
+            <p:ph type="title"/>
+          </p:nvPr>
+        </p:nvSpPr>
+        <p:spPr/>
+        <p:txBody>
+          <a:bodyPr/>
+          <a:lstStyle/>
+          <a:p>
+            <a:r>
+              <a:t>Practice Suggestions</a:t>
+            </a:r>
+          </a:p>
+        </p:txBody>
+      </p:sp>
+      <p:sp>
+        <p:nvSpPr>
+          <p:cNvPr id="3" name="Content Placeholder 2"/>
+          <p:cNvSpPr>
+            <a:spLocks noGrp="1"/>
+          </p:cNvSpPr>
+          <p:nvPr>
+            <p:ph idx="1"/>
+          </p:nvPr>
+        </p:nvSpPr>
+        <p:spPr/>
+        <p:txBody>
+          <a:bodyPr/>
+          <a:lstStyle/>
+          <a:p>
+            <a:r>
+              <a:rPr dirty="0"/>
+              <a:t>Change input: try [0,1,1] or [1,1,1]</a:t>
+            </a:r>
+          </a:p>
+          <a:p>
+            <a:r>
+              <a:rPr dirty="0"/>
+              <a:t>Try </a:t>
+            </a:r>
+            <a:r>
+              <a:rPr lang="en-IE" dirty="0"/>
+              <a:t>other </a:t>
+            </a:r>
+            <a:r>
+              <a:rPr dirty="0"/>
+              <a:t>initial weights and compare convergence</a:t>
+            </a:r>
+          </a:p>
+          <a:p>
+            <a:r>
+              <a:rPr dirty="0"/>
+              <a:t>Use two training examples</a:t>
+            </a:r>
+          </a:p>
+          <a:p>
+            <a:r>
+              <a:rPr dirty="0"/>
+              <a:t>Try tanh activation instead of </a:t>
+            </a:r>
+            <a:r>
+              <a:rPr dirty="0" err="1"/>
+              <a:t>ReLU</a:t>
+            </a:r>
+            <a:endParaRPr lang="en-IE" dirty="0"/>
+          </a:p>
+          <a:p>
+            <a:r>
+              <a:rPr lang="en-IE" dirty="0"/>
+              <a:t>A simpler version to this (with derivatives given) will be on the exam!</a:t>
+            </a:r>
+            <a:endParaRPr dirty="0"/>
+          </a:p>
+        </p:txBody>
+      </p:sp>
+      <p:sp>
+        <p:nvSpPr>
+          <p:cNvPr id="4" name="Slide Number Placeholder 3">
+            <a:extLst>
+              <a:ext uri="{FF2B5EF4-FFF2-40B4-BE49-F238E27FC236}">
+                <a16:creationId xmlns:a16="http://schemas.microsoft.com/office/drawing/2014/main" id="{530CFDDB-24B9-85F1-A0D0-1D0BB45C6990}"/>
+              </a:ext>
+            </a:extLst>
+          </p:cNvPr>
+          <p:cNvSpPr>
+            <a:spLocks noGrp="1"/>
+          </p:cNvSpPr>
+          <p:nvPr>
+            <p:ph type="sldNum" sz="quarter" idx="12"/>
+          </p:nvPr>
+        </p:nvSpPr>
+        <p:spPr/>
+        <p:txBody>
+          <a:bodyPr/>
+          <a:lstStyle/>
+          <a:p>
+            <a:fld id="{8E65201D-48DB-3B45-ABC2-018B1E66F34C}" type="slidenum">
+              <a:rPr lang="en-US" smtClean="0"/>
+              <a:t>19</a:t>
+            </a:fld>
+            <a:endParaRPr lang="en-US"/>
+          </a:p>
+        </p:txBody>
+      </p:sp>
+    </p:spTree>
   </p:cSld>
   <p:clrMapOvr>
     <a:masterClrMapping/>
@@ -4727,7 +5781,7 @@
             </a:r>
             <a:r>
               <a:rPr dirty="0"/>
-              <a:t> learn.</a:t>
+              <a:t> learn</a:t>
             </a:r>
           </a:p>
           <a:p>
@@ -4737,7 +5791,7 @@
             </a:r>
             <a:r>
               <a:rPr dirty="0"/>
-              <a:t> through forward and backward passes.</a:t>
+              <a:t> through forward and backward passes</a:t>
             </a:r>
           </a:p>
           <a:p>
@@ -4747,13 +5801,13 @@
             </a:r>
             <a:r>
               <a:rPr dirty="0"/>
-              <a:t> weights over a few steps (epochs).</a:t>
+              <a:t> weights over a few steps (epochs)</a:t>
             </a:r>
           </a:p>
           <a:p>
             <a:r>
               <a:rPr dirty="0"/>
-              <a:t>Manual learning = strong intuition for automation later.</a:t>
+              <a:t>Manual learning = strong intuition for automation later</a:t>
             </a:r>
           </a:p>
         </p:txBody>
@@ -4788,6 +5842,116 @@
         </p:txBody>
       </p:sp>
     </p:spTree>
+  </p:cSld>
+  <p:clrMapOvr>
+    <a:masterClrMapping/>
+  </p:clrMapOvr>
+</p:sld>
+</file>
+
+<file path=ppt/slides/slide20.xml><?xml version="1.0" encoding="utf-8"?>
+<p:sld xmlns:a="http://schemas.openxmlformats.org/drawingml/2006/main" xmlns:r="http://schemas.openxmlformats.org/officeDocument/2006/relationships" xmlns:p="http://schemas.openxmlformats.org/presentationml/2006/main">
+  <p:cSld>
+    <p:spTree>
+      <p:nvGrpSpPr>
+        <p:cNvPr id="1" name=""/>
+        <p:cNvGrpSpPr/>
+        <p:nvPr/>
+      </p:nvGrpSpPr>
+      <p:grpSpPr>
+        <a:xfrm>
+          <a:off x="0" y="0"/>
+          <a:ext cx="0" cy="0"/>
+          <a:chOff x="0" y="0"/>
+          <a:chExt cx="0" cy="0"/>
+        </a:xfrm>
+      </p:grpSpPr>
+      <p:sp>
+        <p:nvSpPr>
+          <p:cNvPr id="2" name="Title 1">
+            <a:extLst>
+              <a:ext uri="{FF2B5EF4-FFF2-40B4-BE49-F238E27FC236}">
+                <a16:creationId xmlns:a16="http://schemas.microsoft.com/office/drawing/2014/main" id="{5052E3C7-E02A-F443-93FF-99B0D12844EC}"/>
+              </a:ext>
+            </a:extLst>
+          </p:cNvPr>
+          <p:cNvSpPr>
+            <a:spLocks noGrp="1"/>
+          </p:cNvSpPr>
+          <p:nvPr>
+            <p:ph type="title"/>
+          </p:nvPr>
+        </p:nvSpPr>
+        <p:spPr/>
+        <p:txBody>
+          <a:bodyPr/>
+          <a:lstStyle/>
+          <a:p>
+            <a:r>
+              <a:rPr lang="en-US" dirty="0"/>
+              <a:t>Summary</a:t>
+            </a:r>
+          </a:p>
+        </p:txBody>
+      </p:sp>
+      <p:sp>
+        <p:nvSpPr>
+          <p:cNvPr id="3" name="Content Placeholder 2">
+            <a:extLst>
+              <a:ext uri="{FF2B5EF4-FFF2-40B4-BE49-F238E27FC236}">
+                <a16:creationId xmlns:a16="http://schemas.microsoft.com/office/drawing/2014/main" id="{92B1495C-38DD-F9F0-478E-D16C6E4C61EA}"/>
+              </a:ext>
+            </a:extLst>
+          </p:cNvPr>
+          <p:cNvSpPr>
+            <a:spLocks noGrp="1"/>
+          </p:cNvSpPr>
+          <p:nvPr>
+            <p:ph idx="1"/>
+          </p:nvPr>
+        </p:nvSpPr>
+        <p:spPr/>
+        <p:txBody>
+          <a:bodyPr/>
+          <a:lstStyle/>
+          <a:p>
+            <a:pPr marL="457200" indent="-457200">
+              <a:buFont typeface="Arial" panose="020B0604020202020204" pitchFamily="34" charset="0"/>
+              <a:buChar char="•"/>
+            </a:pPr>
+            <a:r>
+              <a:rPr lang="en-US" dirty="0"/>
+              <a:t>It’s a lot of work (and fiddly calculation) to go through a full forward and backward pass of even a simple NN</a:t>
+            </a:r>
+          </a:p>
+          <a:p>
+            <a:pPr marL="457200" indent="-457200">
+              <a:buFont typeface="Arial" panose="020B0604020202020204" pitchFamily="34" charset="0"/>
+              <a:buChar char="•"/>
+            </a:pPr>
+            <a:r>
+              <a:rPr lang="en-US" dirty="0"/>
+              <a:t>All the calculations though are pretty straightforward</a:t>
+            </a:r>
+          </a:p>
+          <a:p>
+            <a:pPr marL="457200" indent="-457200">
+              <a:buFont typeface="Arial" panose="020B0604020202020204" pitchFamily="34" charset="0"/>
+              <a:buChar char="•"/>
+            </a:pPr>
+            <a:r>
+              <a:rPr lang="en-US" dirty="0"/>
+              <a:t>Easy to make small mistakes. Marks given for process not accuracy</a:t>
+            </a:r>
+          </a:p>
+        </p:txBody>
+      </p:sp>
+    </p:spTree>
+    <p:extLst>
+      <p:ext uri="{BB962C8B-B14F-4D97-AF65-F5344CB8AC3E}">
+        <p14:creationId xmlns:p14="http://schemas.microsoft.com/office/powerpoint/2010/main" val="2902375257"/>
+      </p:ext>
+    </p:extLst>
   </p:cSld>
   <p:clrMapOvr>
     <a:masterClrMapping/>
@@ -4846,8 +6010,8 @@
           </a:p>
         </p:txBody>
       </p:sp>
-      <mc:AlternateContent xmlns:mc="http://schemas.openxmlformats.org/markup-compatibility/2006" xmlns:a14="http://schemas.microsoft.com/office/drawing/2010/main">
-        <mc:Choice Requires="a14">
+      <mc:AlternateContent xmlns:mc="http://schemas.openxmlformats.org/markup-compatibility/2006">
+        <mc:Choice xmlns:a14="http://schemas.microsoft.com/office/drawing/2010/main" Requires="a14">
           <p:sp>
             <p:nvSpPr>
               <p:cNvPr id="3" name="Content Placeholder 2"/>
@@ -4965,6 +6129,13 @@
                     </m:sSub>
                   </m:oMath>
                 </a14:m>
+                <a:endParaRPr lang="en-IE" sz="1800" dirty="0"/>
+              </a:p>
+              <a:p>
+                <a:r>
+                  <a:rPr lang="en-IE" sz="1800" dirty="0"/>
+                  <a:t>(e.g. temperature, rainfall, humidity)</a:t>
+                </a:r>
                 <a:endParaRPr lang="ar-AE" sz="1800" dirty="0"/>
               </a:p>
               <a:p>
@@ -4990,13 +6161,19 @@
               <a:p>
                 <a:r>
                   <a:rPr lang="en-IE" sz="1800" dirty="0"/>
+                  <a:t>(e.g. probability of flooding)</a:t>
+                </a:r>
+              </a:p>
+              <a:p>
+                <a:r>
+                  <a:rPr lang="en-IE" sz="1800" dirty="0"/>
                   <a:t>Integer weights and biases for simplicity</a:t>
                 </a:r>
               </a:p>
             </p:txBody>
           </p:sp>
         </mc:Choice>
-        <mc:Fallback xmlns="">
+        <mc:Fallback>
           <p:sp>
             <p:nvSpPr>
               <p:cNvPr id="3" name="Content Placeholder 2"/>
@@ -6702,6 +7879,145 @@
           <p:cNvPr id="2" name="Title 1">
             <a:extLst>
               <a:ext uri="{FF2B5EF4-FFF2-40B4-BE49-F238E27FC236}">
+                <a16:creationId xmlns:a16="http://schemas.microsoft.com/office/drawing/2014/main" id="{AC909CD5-0D27-C700-EF63-907A17D88F7C}"/>
+              </a:ext>
+            </a:extLst>
+          </p:cNvPr>
+          <p:cNvSpPr>
+            <a:spLocks noGrp="1"/>
+          </p:cNvSpPr>
+          <p:nvPr>
+            <p:ph type="ctrTitle"/>
+          </p:nvPr>
+        </p:nvSpPr>
+        <p:spPr/>
+        <p:txBody>
+          <a:bodyPr/>
+          <a:lstStyle/>
+          <a:p>
+            <a:endParaRPr lang="en-US"/>
+          </a:p>
+        </p:txBody>
+      </p:sp>
+      <p:sp>
+        <p:nvSpPr>
+          <p:cNvPr id="3" name="Subtitle 2">
+            <a:extLst>
+              <a:ext uri="{FF2B5EF4-FFF2-40B4-BE49-F238E27FC236}">
+                <a16:creationId xmlns:a16="http://schemas.microsoft.com/office/drawing/2014/main" id="{EDB103A6-675A-6EB3-C4C7-96BAC7659A0F}"/>
+              </a:ext>
+            </a:extLst>
+          </p:cNvPr>
+          <p:cNvSpPr>
+            <a:spLocks noGrp="1"/>
+          </p:cNvSpPr>
+          <p:nvPr>
+            <p:ph type="subTitle" idx="1"/>
+          </p:nvPr>
+        </p:nvSpPr>
+        <p:spPr/>
+        <p:txBody>
+          <a:bodyPr/>
+          <a:lstStyle/>
+          <a:p>
+            <a:endParaRPr lang="en-US"/>
+          </a:p>
+        </p:txBody>
+      </p:sp>
+      <p:sp>
+        <p:nvSpPr>
+          <p:cNvPr id="4" name="Date Placeholder 3">
+            <a:extLst>
+              <a:ext uri="{FF2B5EF4-FFF2-40B4-BE49-F238E27FC236}">
+                <a16:creationId xmlns:a16="http://schemas.microsoft.com/office/drawing/2014/main" id="{D852C8D2-FA1C-474F-2FAF-9DAA037ECAD3}"/>
+              </a:ext>
+            </a:extLst>
+          </p:cNvPr>
+          <p:cNvSpPr>
+            <a:spLocks noGrp="1"/>
+          </p:cNvSpPr>
+          <p:nvPr>
+            <p:ph type="dt" sz="half" idx="10"/>
+          </p:nvPr>
+        </p:nvSpPr>
+        <p:spPr/>
+        <p:txBody>
+          <a:bodyPr/>
+          <a:lstStyle/>
+          <a:p>
+            <a:fld id="{C1B28D5F-B017-3B47-9775-DA319F6143FF}" type="datetime3">
+              <a:rPr lang="en-IE" smtClean="0"/>
+              <a:t>18 February 2026</a:t>
+            </a:fld>
+            <a:endParaRPr lang="en-US" dirty="0"/>
+          </a:p>
+        </p:txBody>
+      </p:sp>
+      <p:pic>
+        <p:nvPicPr>
+          <p:cNvPr id="6" name="slide.url=https://www.polleverywhere.com/multiple_choice_polls/G2QogxeXGHOTBWTu8yCa0?state=opened&amp;flow=Default&amp;onscreen=persist">
+            <a:extLst>
+              <a:ext uri="{FF2B5EF4-FFF2-40B4-BE49-F238E27FC236}">
+                <a16:creationId xmlns:a16="http://schemas.microsoft.com/office/drawing/2014/main" id="{F3CA5AB9-60E4-AD62-CD84-5F0BC4F59AEF}"/>
+              </a:ext>
+            </a:extLst>
+          </p:cNvPr>
+          <p:cNvPicPr>
+            <a:picLocks/>
+          </p:cNvPicPr>
+          <p:nvPr/>
+        </p:nvPicPr>
+        <p:blipFill>
+          <a:blip r:embed="rId3"/>
+          <a:stretch>
+            <a:fillRect/>
+          </a:stretch>
+        </p:blipFill>
+        <p:spPr>
+          <a:xfrm>
+            <a:off x="63500" y="63500"/>
+            <a:ext cx="12065000" cy="6731000"/>
+          </a:xfrm>
+          <a:prstGeom prst="rect">
+            <a:avLst/>
+          </a:prstGeom>
+        </p:spPr>
+      </p:pic>
+    </p:spTree>
+    <p:extLst>
+      <p:ext uri="{BB962C8B-B14F-4D97-AF65-F5344CB8AC3E}">
+        <p14:creationId xmlns:p14="http://schemas.microsoft.com/office/powerpoint/2010/main" val="2626096998"/>
+      </p:ext>
+    </p:extLst>
+  </p:cSld>
+  <p:clrMapOvr>
+    <a:masterClrMapping/>
+  </p:clrMapOvr>
+</p:sld>
+</file>
+
+<file path=ppt/slides/slide5.xml><?xml version="1.0" encoding="utf-8"?>
+<p:sld xmlns:a="http://schemas.openxmlformats.org/drawingml/2006/main" xmlns:r="http://schemas.openxmlformats.org/officeDocument/2006/relationships" xmlns:p="http://schemas.openxmlformats.org/presentationml/2006/main">
+  <p:cSld>
+    <p:spTree>
+      <p:nvGrpSpPr>
+        <p:cNvPr id="1" name=""/>
+        <p:cNvGrpSpPr/>
+        <p:nvPr/>
+      </p:nvGrpSpPr>
+      <p:grpSpPr>
+        <a:xfrm>
+          <a:off x="0" y="0"/>
+          <a:ext cx="0" cy="0"/>
+          <a:chOff x="0" y="0"/>
+          <a:chExt cx="0" cy="0"/>
+        </a:xfrm>
+      </p:grpSpPr>
+      <p:sp>
+        <p:nvSpPr>
+          <p:cNvPr id="2" name="Title 1">
+            <a:extLst>
+              <a:ext uri="{FF2B5EF4-FFF2-40B4-BE49-F238E27FC236}">
                 <a16:creationId xmlns:a16="http://schemas.microsoft.com/office/drawing/2014/main" id="{C2B52D46-41F7-C24B-8D15-AF127CC2C5AE}"/>
               </a:ext>
             </a:extLst>
@@ -6795,7 +8111,7 @@
                   <a:spcPts val="600"/>
                 </a:spcAft>
               </a:pPr>
-              <a:t>4</a:t>
+              <a:t>5</a:t>
             </a:fld>
             <a:endParaRPr lang="en-US">
               <a:solidFill>
@@ -9764,139 +11080,6 @@
 </p:sld>
 </file>
 
-<file path=ppt/slides/slide5.xml><?xml version="1.0" encoding="utf-8"?>
-<p:sld xmlns:a="http://schemas.openxmlformats.org/drawingml/2006/main" xmlns:r="http://schemas.openxmlformats.org/officeDocument/2006/relationships" xmlns:p="http://schemas.openxmlformats.org/presentationml/2006/main">
-  <p:cSld>
-    <p:spTree>
-      <p:nvGrpSpPr>
-        <p:cNvPr id="1" name=""/>
-        <p:cNvGrpSpPr/>
-        <p:nvPr/>
-      </p:nvGrpSpPr>
-      <p:grpSpPr>
-        <a:xfrm>
-          <a:off x="0" y="0"/>
-          <a:ext cx="0" cy="0"/>
-          <a:chOff x="0" y="0"/>
-          <a:chExt cx="0" cy="0"/>
-        </a:xfrm>
-      </p:grpSpPr>
-      <p:sp>
-        <p:nvSpPr>
-          <p:cNvPr id="2" name="Title 1"/>
-          <p:cNvSpPr>
-            <a:spLocks noGrp="1"/>
-          </p:cNvSpPr>
-          <p:nvPr>
-            <p:ph type="title"/>
-          </p:nvPr>
-        </p:nvSpPr>
-        <p:spPr/>
-        <p:txBody>
-          <a:bodyPr/>
-          <a:lstStyle/>
-          <a:p>
-            <a:r>
-              <a:t>Input and Target</a:t>
-            </a:r>
-          </a:p>
-        </p:txBody>
-      </p:sp>
-      <p:sp>
-        <p:nvSpPr>
-          <p:cNvPr id="3" name="Content Placeholder 2"/>
-          <p:cNvSpPr>
-            <a:spLocks noGrp="1"/>
-          </p:cNvSpPr>
-          <p:nvPr>
-            <p:ph idx="1"/>
-          </p:nvPr>
-        </p:nvSpPr>
-        <p:spPr/>
-        <p:txBody>
-          <a:bodyPr/>
-          <a:lstStyle/>
-          <a:p>
-            <a:r>
-              <a:rPr dirty="0"/>
-              <a:t>One input vector: [1, 0, 1]</a:t>
-            </a:r>
-          </a:p>
-          <a:p>
-            <a:r>
-              <a:rPr dirty="0"/>
-              <a:t>Target output (label): 1</a:t>
-            </a:r>
-            <a:endParaRPr lang="en-IE" dirty="0"/>
-          </a:p>
-          <a:p>
-            <a:r>
-              <a:rPr lang="en-IE" dirty="0"/>
-              <a:t>So this is a classification model</a:t>
-            </a:r>
-            <a:endParaRPr dirty="0"/>
-          </a:p>
-          <a:p>
-            <a:r>
-              <a:rPr dirty="0"/>
-              <a:t>Goal: network output should approach 1 over time</a:t>
-            </a:r>
-            <a:endParaRPr lang="en-IE" dirty="0"/>
-          </a:p>
-          <a:p>
-            <a:r>
-              <a:rPr lang="en-IE" dirty="0">
-                <a:solidFill>
-                  <a:srgbClr val="009749"/>
-                </a:solidFill>
-              </a:rPr>
-              <a:t>On the board: for given weights and biases compute the forward pass</a:t>
-            </a:r>
-            <a:endParaRPr dirty="0">
-              <a:solidFill>
-                <a:srgbClr val="009749"/>
-              </a:solidFill>
-            </a:endParaRPr>
-          </a:p>
-        </p:txBody>
-      </p:sp>
-      <p:sp>
-        <p:nvSpPr>
-          <p:cNvPr id="4" name="Slide Number Placeholder 3">
-            <a:extLst>
-              <a:ext uri="{FF2B5EF4-FFF2-40B4-BE49-F238E27FC236}">
-                <a16:creationId xmlns:a16="http://schemas.microsoft.com/office/drawing/2014/main" id="{2046FC88-4B9D-21B7-515D-3E84B3DB2280}"/>
-              </a:ext>
-            </a:extLst>
-          </p:cNvPr>
-          <p:cNvSpPr>
-            <a:spLocks noGrp="1"/>
-          </p:cNvSpPr>
-          <p:nvPr>
-            <p:ph type="sldNum" sz="quarter" idx="12"/>
-          </p:nvPr>
-        </p:nvSpPr>
-        <p:spPr/>
-        <p:txBody>
-          <a:bodyPr/>
-          <a:lstStyle/>
-          <a:p>
-            <a:fld id="{8E65201D-48DB-3B45-ABC2-018B1E66F34C}" type="slidenum">
-              <a:rPr lang="en-US" smtClean="0"/>
-              <a:t>5</a:t>
-            </a:fld>
-            <a:endParaRPr lang="en-US"/>
-          </a:p>
-        </p:txBody>
-      </p:sp>
-    </p:spTree>
-  </p:cSld>
-  <p:clrMapOvr>
-    <a:masterClrMapping/>
-  </p:clrMapOvr>
-</p:sld>
-</file>
-
 <file path=ppt/slides/slide6.xml><?xml version="1.0" encoding="utf-8"?>
 <p:sld xmlns:a="http://schemas.openxmlformats.org/drawingml/2006/main" xmlns:r="http://schemas.openxmlformats.org/officeDocument/2006/relationships" xmlns:p="http://schemas.openxmlformats.org/presentationml/2006/main">
   <p:cSld>
@@ -9930,6 +11113,139 @@
           <a:lstStyle/>
           <a:p>
             <a:r>
+              <a:t>Input and Target</a:t>
+            </a:r>
+          </a:p>
+        </p:txBody>
+      </p:sp>
+      <p:sp>
+        <p:nvSpPr>
+          <p:cNvPr id="3" name="Content Placeholder 2"/>
+          <p:cNvSpPr>
+            <a:spLocks noGrp="1"/>
+          </p:cNvSpPr>
+          <p:nvPr>
+            <p:ph idx="1"/>
+          </p:nvPr>
+        </p:nvSpPr>
+        <p:spPr/>
+        <p:txBody>
+          <a:bodyPr/>
+          <a:lstStyle/>
+          <a:p>
+            <a:r>
+              <a:rPr dirty="0"/>
+              <a:t>One input vector: [1, 0, 1]</a:t>
+            </a:r>
+          </a:p>
+          <a:p>
+            <a:r>
+              <a:rPr dirty="0"/>
+              <a:t>Target output (label): 1</a:t>
+            </a:r>
+            <a:endParaRPr lang="en-IE" dirty="0"/>
+          </a:p>
+          <a:p>
+            <a:r>
+              <a:rPr lang="en-IE" dirty="0"/>
+              <a:t>So this is a classification model</a:t>
+            </a:r>
+            <a:endParaRPr dirty="0"/>
+          </a:p>
+          <a:p>
+            <a:r>
+              <a:rPr dirty="0"/>
+              <a:t>Goal: network output should approach 1 over time</a:t>
+            </a:r>
+            <a:endParaRPr lang="en-IE" dirty="0"/>
+          </a:p>
+          <a:p>
+            <a:r>
+              <a:rPr lang="en-IE" dirty="0">
+                <a:solidFill>
+                  <a:srgbClr val="009749"/>
+                </a:solidFill>
+              </a:rPr>
+              <a:t>On the board: for given weights and biases compute the forward pass</a:t>
+            </a:r>
+            <a:endParaRPr dirty="0">
+              <a:solidFill>
+                <a:srgbClr val="009749"/>
+              </a:solidFill>
+            </a:endParaRPr>
+          </a:p>
+        </p:txBody>
+      </p:sp>
+      <p:sp>
+        <p:nvSpPr>
+          <p:cNvPr id="4" name="Slide Number Placeholder 3">
+            <a:extLst>
+              <a:ext uri="{FF2B5EF4-FFF2-40B4-BE49-F238E27FC236}">
+                <a16:creationId xmlns:a16="http://schemas.microsoft.com/office/drawing/2014/main" id="{2046FC88-4B9D-21B7-515D-3E84B3DB2280}"/>
+              </a:ext>
+            </a:extLst>
+          </p:cNvPr>
+          <p:cNvSpPr>
+            <a:spLocks noGrp="1"/>
+          </p:cNvSpPr>
+          <p:nvPr>
+            <p:ph type="sldNum" sz="quarter" idx="12"/>
+          </p:nvPr>
+        </p:nvSpPr>
+        <p:spPr/>
+        <p:txBody>
+          <a:bodyPr/>
+          <a:lstStyle/>
+          <a:p>
+            <a:fld id="{8E65201D-48DB-3B45-ABC2-018B1E66F34C}" type="slidenum">
+              <a:rPr lang="en-US" smtClean="0"/>
+              <a:t>6</a:t>
+            </a:fld>
+            <a:endParaRPr lang="en-US"/>
+          </a:p>
+        </p:txBody>
+      </p:sp>
+    </p:spTree>
+  </p:cSld>
+  <p:clrMapOvr>
+    <a:masterClrMapping/>
+  </p:clrMapOvr>
+</p:sld>
+</file>
+
+<file path=ppt/slides/slide7.xml><?xml version="1.0" encoding="utf-8"?>
+<p:sld xmlns:a="http://schemas.openxmlformats.org/drawingml/2006/main" xmlns:r="http://schemas.openxmlformats.org/officeDocument/2006/relationships" xmlns:p="http://schemas.openxmlformats.org/presentationml/2006/main">
+  <p:cSld>
+    <p:spTree>
+      <p:nvGrpSpPr>
+        <p:cNvPr id="1" name=""/>
+        <p:cNvGrpSpPr/>
+        <p:nvPr/>
+      </p:nvGrpSpPr>
+      <p:grpSpPr>
+        <a:xfrm>
+          <a:off x="0" y="0"/>
+          <a:ext cx="0" cy="0"/>
+          <a:chOff x="0" y="0"/>
+          <a:chExt cx="0" cy="0"/>
+        </a:xfrm>
+      </p:grpSpPr>
+      <p:sp>
+        <p:nvSpPr>
+          <p:cNvPr id="2" name="Title 1"/>
+          <p:cNvSpPr>
+            <a:spLocks noGrp="1"/>
+          </p:cNvSpPr>
+          <p:nvPr>
+            <p:ph type="title"/>
+          </p:nvPr>
+        </p:nvSpPr>
+        <p:spPr/>
+        <p:txBody>
+          <a:bodyPr/>
+          <a:lstStyle/>
+          <a:p>
+            <a:r>
               <a:t>Initialize Weights and Biases</a:t>
             </a:r>
           </a:p>
@@ -9994,8 +11310,8 @@
           </a:p>
         </p:txBody>
       </p:sp>
-      <mc:AlternateContent xmlns:mc="http://schemas.openxmlformats.org/markup-compatibility/2006" xmlns:a14="http://schemas.microsoft.com/office/drawing/2010/main">
-        <mc:Choice Requires="a14">
+      <mc:AlternateContent xmlns:mc="http://schemas.openxmlformats.org/markup-compatibility/2006">
+        <mc:Choice xmlns:a14="http://schemas.microsoft.com/office/drawing/2010/main" Requires="a14">
           <p:sp>
             <p:nvSpPr>
               <p:cNvPr id="6" name="Content Placeholder 5">
@@ -10172,7 +11488,7 @@
                 </a14:m>
                 <a:r>
                   <a:rPr lang="en-IE" dirty="0"/>
-                  <a:t> = [0, 0]</a:t>
+                  <a:t> = [0, 1]</a:t>
                 </a:r>
               </a:p>
               <a:p>
@@ -10259,7 +11575,7 @@
             </p:txBody>
           </p:sp>
         </mc:Choice>
-        <mc:Fallback xmlns="">
+        <mc:Fallback>
           <p:sp>
             <p:nvSpPr>
               <p:cNvPr id="6" name="Content Placeholder 5">
@@ -10322,7 +11638,7 @@
           <a:p>
             <a:fld id="{8E65201D-48DB-3B45-ABC2-018B1E66F34C}" type="slidenum">
               <a:rPr lang="en-US" smtClean="0"/>
-              <a:t>6</a:t>
+              <a:t>7</a:t>
             </a:fld>
             <a:endParaRPr lang="en-US"/>
           </a:p>
@@ -10336,7 +11652,7 @@
 </p:sld>
 </file>
 
-<file path=ppt/slides/slide7.xml><?xml version="1.0" encoding="utf-8"?>
+<file path=ppt/slides/slide8.xml><?xml version="1.0" encoding="utf-8"?>
 <p:sld xmlns:a="http://schemas.openxmlformats.org/drawingml/2006/main" xmlns:r="http://schemas.openxmlformats.org/officeDocument/2006/relationships" xmlns:p="http://schemas.openxmlformats.org/presentationml/2006/main">
   <p:cSld>
     <p:spTree>
@@ -10375,8 +11691,8 @@
           </a:p>
         </p:txBody>
       </p:sp>
-      <mc:AlternateContent xmlns:mc="http://schemas.openxmlformats.org/markup-compatibility/2006" xmlns:a14="http://schemas.microsoft.com/office/drawing/2010/main">
-        <mc:Choice Requires="a14">
+      <mc:AlternateContent xmlns:mc="http://schemas.openxmlformats.org/markup-compatibility/2006">
+        <mc:Choice xmlns:a14="http://schemas.microsoft.com/office/drawing/2010/main" Requires="a14">
           <p:sp>
             <p:nvSpPr>
               <p:cNvPr id="3" name="Content Placeholder 2"/>
@@ -10534,31 +11850,31 @@
               <a:p>
                 <a:r>
                   <a:rPr lang="en-IE" dirty="0"/>
-                  <a:t>Compare network output to target label.</a:t>
+                  <a:t>Compare network output to target label</a:t>
                 </a:r>
               </a:p>
               <a:p>
                 <a:r>
                   <a:rPr lang="en-IE" dirty="0"/>
-                  <a:t>Loss is high if output far from target.</a:t>
+                  <a:t>Loss is high if output far from target</a:t>
                 </a:r>
               </a:p>
               <a:p>
                 <a:r>
                   <a:rPr lang="en-IE" dirty="0"/>
-                  <a:t>Loss tells us how ‘wrong’ the current weights and biases are.</a:t>
+                  <a:t>Loss tells us how ‘wrong’ the current weights and biases are</a:t>
                 </a:r>
               </a:p>
               <a:p>
                 <a:r>
                   <a:rPr lang="cy-GB" dirty="0"/>
-                  <a:t>Loss is high → backpropagation needed.</a:t>
+                  <a:t>Loss is high → backpropagation needed</a:t>
                 </a:r>
               </a:p>
               <a:p>
                 <a:r>
                   <a:rPr lang="cy-GB" dirty="0"/>
-                  <a:t>We will now update weights.</a:t>
+                  <a:t>We will now update weights</a:t>
                 </a:r>
               </a:p>
               <a:p>
@@ -10567,7 +11883,7 @@
             </p:txBody>
           </p:sp>
         </mc:Choice>
-        <mc:Fallback xmlns="">
+        <mc:Fallback>
           <p:sp>
             <p:nvSpPr>
               <p:cNvPr id="3" name="Content Placeholder 2"/>
@@ -10582,7 +11898,7 @@
               <a:blipFill>
                 <a:blip r:embed="rId2"/>
                 <a:stretch>
-                  <a:fillRect l="-1315" t="-2349"/>
+                  <a:fillRect l="-1368" t="-2439"/>
                 </a:stretch>
               </a:blipFill>
             </p:spPr>
@@ -10591,7 +11907,7 @@
               <a:lstStyle/>
               <a:p>
                 <a:r>
-                  <a:rPr lang="en-IE">
+                  <a:rPr lang="en-US">
                     <a:noFill/>
                   </a:rPr>
                   <a:t> </a:t>
@@ -10624,7 +11940,7 @@
           <a:p>
             <a:fld id="{8E65201D-48DB-3B45-ABC2-018B1E66F34C}" type="slidenum">
               <a:rPr lang="en-US" smtClean="0"/>
-              <a:t>7</a:t>
+              <a:t>8</a:t>
             </a:fld>
             <a:endParaRPr lang="en-US"/>
           </a:p>
@@ -10834,7 +12150,7 @@
 </p:sld>
 </file>
 
-<file path=ppt/slides/slide8.xml><?xml version="1.0" encoding="utf-8"?>
+<file path=ppt/slides/slide9.xml><?xml version="1.0" encoding="utf-8"?>
 <p:sld xmlns:a="http://schemas.openxmlformats.org/drawingml/2006/main" xmlns:r="http://schemas.openxmlformats.org/officeDocument/2006/relationships" xmlns:p="http://schemas.openxmlformats.org/presentationml/2006/main">
   <p:cSld>
     <p:spTree>
@@ -10853,81 +12169,10 @@
       </p:grpSpPr>
       <p:sp>
         <p:nvSpPr>
-          <p:cNvPr id="2" name="Title 1"/>
-          <p:cNvSpPr>
-            <a:spLocks noGrp="1"/>
-          </p:cNvSpPr>
-          <p:nvPr>
-            <p:ph type="title"/>
-          </p:nvPr>
-        </p:nvSpPr>
-        <p:spPr/>
-        <p:txBody>
-          <a:bodyPr/>
-          <a:lstStyle/>
-          <a:p>
-            <a:r>
-              <a:rPr lang="en-IE" dirty="0"/>
-              <a:t>Now perform </a:t>
-            </a:r>
-            <a:r>
-              <a:rPr lang="en-IE" dirty="0" err="1"/>
-              <a:t>ba</a:t>
-            </a:r>
-            <a:r>
-              <a:rPr dirty="0" err="1"/>
-              <a:t>ckpropagation</a:t>
-            </a:r>
-            <a:endParaRPr dirty="0"/>
-          </a:p>
-        </p:txBody>
-      </p:sp>
-      <p:sp>
-        <p:nvSpPr>
-          <p:cNvPr id="3" name="Content Placeholder 2"/>
-          <p:cNvSpPr>
-            <a:spLocks noGrp="1"/>
-          </p:cNvSpPr>
-          <p:nvPr>
-            <p:ph idx="1"/>
-          </p:nvPr>
-        </p:nvSpPr>
-        <p:spPr/>
-        <p:txBody>
-          <a:bodyPr/>
-          <a:lstStyle/>
-          <a:p>
-            <a:r>
-              <a:rPr dirty="0"/>
-              <a:t>Compute error at the output layer.</a:t>
-            </a:r>
-          </a:p>
-          <a:p>
-            <a:r>
-              <a:rPr dirty="0"/>
-              <a:t>Adjust output weights to reduce the error.</a:t>
-            </a:r>
-          </a:p>
-          <a:p>
-            <a:r>
-              <a:rPr dirty="0"/>
-              <a:t>Propagate error backward to hidden layer.</a:t>
-            </a:r>
-          </a:p>
-          <a:p>
-            <a:r>
-              <a:rPr dirty="0"/>
-              <a:t>Weights are updated to reduce future errors.</a:t>
-            </a:r>
-          </a:p>
-        </p:txBody>
-      </p:sp>
-      <p:sp>
-        <p:nvSpPr>
-          <p:cNvPr id="4" name="Slide Number Placeholder 3">
+          <p:cNvPr id="2" name="Title 1">
             <a:extLst>
               <a:ext uri="{FF2B5EF4-FFF2-40B4-BE49-F238E27FC236}">
-                <a16:creationId xmlns:a16="http://schemas.microsoft.com/office/drawing/2014/main" id="{438CBD1D-2B62-76C5-3E79-43A22F49C3E5}"/>
+                <a16:creationId xmlns:a16="http://schemas.microsoft.com/office/drawing/2014/main" id="{81F05E33-C788-17B9-AEB7-BB3B1BA1E6B5}"/>
               </a:ext>
             </a:extLst>
           </p:cNvPr>
@@ -10935,7 +12180,7 @@
             <a:spLocks noGrp="1"/>
           </p:cNvSpPr>
           <p:nvPr>
-            <p:ph type="sldNum" sz="quarter" idx="12"/>
+            <p:ph type="ctrTitle"/>
           </p:nvPr>
         </p:nvSpPr>
         <p:spPr/>
@@ -10943,51 +12188,16 @@
           <a:bodyPr/>
           <a:lstStyle/>
           <a:p>
-            <a:fld id="{8E65201D-48DB-3B45-ABC2-018B1E66F34C}" type="slidenum">
-              <a:rPr lang="en-US" smtClean="0"/>
-              <a:t>8</a:t>
-            </a:fld>
             <a:endParaRPr lang="en-US"/>
           </a:p>
         </p:txBody>
       </p:sp>
-    </p:spTree>
-  </p:cSld>
-  <p:clrMapOvr>
-    <a:masterClrMapping/>
-  </p:clrMapOvr>
-</p:sld>
-</file>
-
-<file path=ppt/slides/slide9.xml><?xml version="1.0" encoding="utf-8"?>
-<p:sld xmlns:a="http://schemas.openxmlformats.org/drawingml/2006/main" xmlns:r="http://schemas.openxmlformats.org/officeDocument/2006/relationships" xmlns:p="http://schemas.openxmlformats.org/presentationml/2006/main">
-  <p:cSld>
-    <p:spTree>
-      <p:nvGrpSpPr>
-        <p:cNvPr id="1" name="">
-          <a:extLst>
-            <a:ext uri="{FF2B5EF4-FFF2-40B4-BE49-F238E27FC236}">
-              <a16:creationId xmlns:a16="http://schemas.microsoft.com/office/drawing/2014/main" id="{A221DDD3-A497-319C-C5EA-CBF2F66D878F}"/>
-            </a:ext>
-          </a:extLst>
-        </p:cNvPr>
-        <p:cNvGrpSpPr/>
-        <p:nvPr/>
-      </p:nvGrpSpPr>
-      <p:grpSpPr>
-        <a:xfrm>
-          <a:off x="0" y="0"/>
-          <a:ext cx="0" cy="0"/>
-          <a:chOff x="0" y="0"/>
-          <a:chExt cx="0" cy="0"/>
-        </a:xfrm>
-      </p:grpSpPr>
       <p:sp>
         <p:nvSpPr>
-          <p:cNvPr id="2" name="Title 1">
+          <p:cNvPr id="3" name="Subtitle 2">
             <a:extLst>
               <a:ext uri="{FF2B5EF4-FFF2-40B4-BE49-F238E27FC236}">
-                <a16:creationId xmlns:a16="http://schemas.microsoft.com/office/drawing/2014/main" id="{CF62EB35-771B-A3E4-44B3-D3BFB7E1A676}"/>
+                <a16:creationId xmlns:a16="http://schemas.microsoft.com/office/drawing/2014/main" id="{037EED2A-42EC-7D99-E680-3641F258A724}"/>
               </a:ext>
             </a:extLst>
           </p:cNvPr>
@@ -10995,7 +12205,7 @@
             <a:spLocks noGrp="1"/>
           </p:cNvSpPr>
           <p:nvPr>
-            <p:ph type="title"/>
+            <p:ph type="subTitle" idx="1"/>
           </p:nvPr>
         </p:nvSpPr>
         <p:spPr/>
@@ -11003,20 +12213,16 @@
           <a:bodyPr/>
           <a:lstStyle/>
           <a:p>
-            <a:r>
-              <a:rPr lang="en-IE" dirty="0"/>
-              <a:t>Overall algorithm</a:t>
-            </a:r>
-            <a:endParaRPr dirty="0"/>
+            <a:endParaRPr lang="en-US"/>
           </a:p>
         </p:txBody>
       </p:sp>
       <p:sp>
         <p:nvSpPr>
-          <p:cNvPr id="3" name="Content Placeholder 2">
+          <p:cNvPr id="4" name="Date Placeholder 3">
             <a:extLst>
               <a:ext uri="{FF2B5EF4-FFF2-40B4-BE49-F238E27FC236}">
-                <a16:creationId xmlns:a16="http://schemas.microsoft.com/office/drawing/2014/main" id="{D711FC48-C9ED-EB6D-32DB-DD72A1427971}"/>
+                <a16:creationId xmlns:a16="http://schemas.microsoft.com/office/drawing/2014/main" id="{9B87D45D-C834-9EE1-9949-37DD2B6E1D9F}"/>
               </a:ext>
             </a:extLst>
           </p:cNvPr>
@@ -11024,208 +12230,7 @@
             <a:spLocks noGrp="1"/>
           </p:cNvSpPr>
           <p:nvPr>
-            <p:ph idx="1"/>
-          </p:nvPr>
-        </p:nvSpPr>
-        <p:spPr>
-          <a:xfrm>
-            <a:off x="838199" y="1825625"/>
-            <a:ext cx="9932469" cy="4149290"/>
-          </a:xfrm>
-        </p:spPr>
-        <p:txBody>
-          <a:bodyPr>
-            <a:normAutofit lnSpcReduction="10000"/>
-          </a:bodyPr>
-          <a:lstStyle/>
-          <a:p>
-            <a:pPr marL="342900" indent="-342900">
-              <a:buAutoNum type="arabicPeriod"/>
-              <a:defRPr sz="1400">
-                <a:latin typeface="Courier New"/>
-              </a:defRPr>
-            </a:pPr>
-            <a:r>
-              <a:rPr lang="cy-GB" sz="1600" b="1" dirty="0"/>
-              <a:t>Initialize</a:t>
-            </a:r>
-            <a:r>
-              <a:rPr lang="cy-GB" sz="1600" dirty="0"/>
-              <a:t> all weights and biases (e.g., to 0 or small integers).</a:t>
-            </a:r>
-            <a:br>
-              <a:rPr lang="cy-GB" sz="1600" dirty="0"/>
-            </a:br>
-            <a:r>
-              <a:rPr lang="cy-GB" sz="1600" dirty="0"/>
-              <a:t>2. For each epoch:</a:t>
-            </a:r>
-            <a:br>
-              <a:rPr lang="cy-GB" sz="1600" dirty="0"/>
-            </a:br>
-            <a:r>
-              <a:rPr lang="cy-GB" sz="1600" dirty="0"/>
-              <a:t>   a. </a:t>
-            </a:r>
-            <a:r>
-              <a:rPr lang="cy-GB" sz="1600" b="1" dirty="0"/>
-              <a:t>Forward pass:</a:t>
-            </a:r>
-            <a:br>
-              <a:rPr lang="cy-GB" sz="1600" dirty="0"/>
-            </a:br>
-            <a:r>
-              <a:rPr lang="cy-GB" sz="1600" dirty="0"/>
-              <a:t>      i.  Compute hidden layer pre-activations: z₁ = w₁·x + b₁, z₂ = w₂·x + b₂</a:t>
-            </a:r>
-            <a:br>
-              <a:rPr lang="cy-GB" sz="1600" dirty="0"/>
-            </a:br>
-            <a:r>
-              <a:rPr lang="cy-GB" sz="1600" dirty="0"/>
-              <a:t>      ii. Apply ReLU activation: h₁ = ReLU(z₁), h₂ = ReLU(z₂)</a:t>
-            </a:r>
-            <a:br>
-              <a:rPr lang="cy-GB" sz="1600" dirty="0"/>
-            </a:br>
-            <a:r>
-              <a:rPr lang="cy-GB" sz="1600" dirty="0"/>
-              <a:t>      iii. Compute output layer input: zₒ = wₒ·h + bₒ</a:t>
-            </a:r>
-            <a:br>
-              <a:rPr lang="cy-GB" sz="1600" dirty="0"/>
-            </a:br>
-            <a:r>
-              <a:rPr lang="cy-GB" sz="1600" dirty="0"/>
-              <a:t>      iv. Apply Sigmoid activation to get prediction: ŷ = </a:t>
-            </a:r>
-            <a:r>
-              <a:rPr lang="el-GR" sz="1600" dirty="0"/>
-              <a:t>σ(</a:t>
-            </a:r>
-            <a:r>
-              <a:rPr lang="cy-GB" sz="1600" dirty="0"/>
-              <a:t>zₒ)</a:t>
-            </a:r>
-            <a:br>
-              <a:rPr lang="cy-GB" sz="1600" dirty="0"/>
-            </a:br>
-            <a:r>
-              <a:rPr lang="cy-GB" sz="1600" dirty="0"/>
-              <a:t>   b. </a:t>
-            </a:r>
-            <a:r>
-              <a:rPr lang="cy-GB" sz="1600" b="1" dirty="0"/>
-              <a:t>Compute Loss:</a:t>
-            </a:r>
-            <a:br>
-              <a:rPr lang="cy-GB" sz="1600" b="1" dirty="0"/>
-            </a:br>
-            <a:r>
-              <a:rPr lang="cy-GB" sz="1600" dirty="0"/>
-              <a:t>      i.  Use Binary Cross-Entropy: L = -[y·log(ŷ) + (1−y)·log(1−ŷ)]</a:t>
-            </a:r>
-            <a:br>
-              <a:rPr lang="cy-GB" sz="1600" dirty="0"/>
-            </a:br>
-            <a:r>
-              <a:rPr lang="cy-GB" sz="1600" dirty="0"/>
-              <a:t>   c. </a:t>
-            </a:r>
-            <a:r>
-              <a:rPr lang="cy-GB" sz="1600" b="1" dirty="0"/>
-              <a:t>Backward pass:</a:t>
-            </a:r>
-            <a:br>
-              <a:rPr lang="cy-GB" sz="1600" dirty="0"/>
-            </a:br>
-            <a:r>
-              <a:rPr lang="cy-GB" sz="1600" dirty="0"/>
-              <a:t>      i.  Compute gradient of loss with respect to output weights</a:t>
-            </a:r>
-            <a:br>
-              <a:rPr lang="cy-GB" sz="1600" dirty="0"/>
-            </a:br>
-            <a:r>
-              <a:rPr lang="cy-GB" sz="1600" dirty="0"/>
-              <a:t>      ii. Backpropagate error to hidden weights only if ReLU &gt; 0</a:t>
-            </a:r>
-            <a:br>
-              <a:rPr lang="cy-GB" sz="1600" dirty="0"/>
-            </a:br>
-            <a:r>
-              <a:rPr lang="cy-GB" sz="1600" dirty="0"/>
-              <a:t>   d. </a:t>
-            </a:r>
-            <a:r>
-              <a:rPr lang="cy-GB" sz="1600" b="1" dirty="0"/>
-              <a:t>Update parameters:</a:t>
-            </a:r>
-            <a:br>
-              <a:rPr lang="cy-GB" sz="1600" dirty="0"/>
-            </a:br>
-            <a:r>
-              <a:rPr lang="cy-GB" sz="1600" dirty="0"/>
-              <a:t>      i.  Adjust weights and biases with gradient steps</a:t>
-            </a:r>
-            <a:br>
-              <a:rPr lang="cy-GB" sz="1600" dirty="0"/>
-            </a:br>
-            <a:r>
-              <a:rPr lang="cy-GB" sz="1600" dirty="0"/>
-              <a:t>      ii. Stop after desired number of epochs</a:t>
-            </a:r>
-          </a:p>
-          <a:p>
-            <a:pPr marL="342900" indent="-342900">
-              <a:buAutoNum type="arabicPeriod"/>
-              <a:defRPr sz="1400">
-                <a:latin typeface="Courier New"/>
-              </a:defRPr>
-            </a:pPr>
-            <a:endParaRPr lang="cy-GB" sz="1600" dirty="0"/>
-          </a:p>
-          <a:p>
-            <a:pPr>
-              <a:defRPr sz="1400">
-                <a:latin typeface="Courier New"/>
-              </a:defRPr>
-            </a:pPr>
-            <a:r>
-              <a:rPr lang="en-IE" sz="3200" dirty="0">
-                <a:solidFill>
-                  <a:srgbClr val="009749"/>
-                </a:solidFill>
-                <a:latin typeface="+mn-lt"/>
-              </a:rPr>
-              <a:t>On the board: go through all the steps!</a:t>
-            </a:r>
-          </a:p>
-          <a:p>
-            <a:pPr marL="342900" indent="-342900">
-              <a:buAutoNum type="arabicPeriod"/>
-              <a:defRPr sz="1400">
-                <a:latin typeface="Courier New"/>
-              </a:defRPr>
-            </a:pPr>
-            <a:endParaRPr lang="cy-GB" sz="1600" dirty="0"/>
-          </a:p>
-        </p:txBody>
-      </p:sp>
-      <p:sp>
-        <p:nvSpPr>
-          <p:cNvPr id="4" name="Slide Number Placeholder 3">
-            <a:extLst>
-              <a:ext uri="{FF2B5EF4-FFF2-40B4-BE49-F238E27FC236}">
-                <a16:creationId xmlns:a16="http://schemas.microsoft.com/office/drawing/2014/main" id="{E20E9D86-5815-12FA-A1E7-B6086B52F597}"/>
-              </a:ext>
-            </a:extLst>
-          </p:cNvPr>
-          <p:cNvSpPr>
-            <a:spLocks noGrp="1"/>
-          </p:cNvSpPr>
-          <p:nvPr>
-            <p:ph type="sldNum" sz="quarter" idx="12"/>
+            <p:ph type="dt" sz="half" idx="10"/>
           </p:nvPr>
         </p:nvSpPr>
         <p:spPr/>
@@ -11233,18 +12238,48 @@
           <a:bodyPr/>
           <a:lstStyle/>
           <a:p>
-            <a:fld id="{8E65201D-48DB-3B45-ABC2-018B1E66F34C}" type="slidenum">
-              <a:rPr lang="en-US" smtClean="0"/>
-              <a:t>9</a:t>
+            <a:fld id="{C1B28D5F-B017-3B47-9775-DA319F6143FF}" type="datetime3">
+              <a:rPr lang="en-IE" smtClean="0"/>
+              <a:t>18 February 2026</a:t>
             </a:fld>
-            <a:endParaRPr lang="en-US"/>
+            <a:endParaRPr lang="en-US" dirty="0"/>
           </a:p>
         </p:txBody>
       </p:sp>
+      <p:pic>
+        <p:nvPicPr>
+          <p:cNvPr id="6" name="slide.url=https://www.polleverywhere.com/multiple_choice_polls/JZznzugwkVdpZNiwRE2Af?state=opened&amp;flow=Default&amp;onscreen=persist">
+            <a:extLst>
+              <a:ext uri="{FF2B5EF4-FFF2-40B4-BE49-F238E27FC236}">
+                <a16:creationId xmlns:a16="http://schemas.microsoft.com/office/drawing/2014/main" id="{1A3B9D91-11CF-5F07-7AA8-C98EB90F9E17}"/>
+              </a:ext>
+            </a:extLst>
+          </p:cNvPr>
+          <p:cNvPicPr>
+            <a:picLocks/>
+          </p:cNvPicPr>
+          <p:nvPr/>
+        </p:nvPicPr>
+        <p:blipFill>
+          <a:blip r:embed="rId3"/>
+          <a:stretch>
+            <a:fillRect/>
+          </a:stretch>
+        </p:blipFill>
+        <p:spPr>
+          <a:xfrm>
+            <a:off x="63500" y="63500"/>
+            <a:ext cx="12065000" cy="6731000"/>
+          </a:xfrm>
+          <a:prstGeom prst="rect">
+            <a:avLst/>
+          </a:prstGeom>
+        </p:spPr>
+      </p:pic>
     </p:spTree>
     <p:extLst>
       <p:ext uri="{BB962C8B-B14F-4D97-AF65-F5344CB8AC3E}">
-        <p14:creationId xmlns:p14="http://schemas.microsoft.com/office/powerpoint/2010/main" val="1675298222"/>
+        <p14:creationId xmlns:p14="http://schemas.microsoft.com/office/powerpoint/2010/main" val="2002406269"/>
       </p:ext>
     </p:extLst>
   </p:cSld>

--- a/slides/day 2/D2C1_ANN.pptx
+++ b/slides/day 2/D2C1_ANN.pptx
@@ -5,7 +5,7 @@
     <p:sldMasterId id="2147483648" r:id="rId1"/>
   </p:sldMasterIdLst>
   <p:notesMasterIdLst>
-    <p:notesMasterId r:id="rId22"/>
+    <p:notesMasterId r:id="rId19"/>
   </p:notesMasterIdLst>
   <p:sldIdLst>
     <p:sldId id="256" r:id="rId2"/>
@@ -19,15 +19,12 @@
     <p:sldId id="288" r:id="rId10"/>
     <p:sldId id="265" r:id="rId11"/>
     <p:sldId id="283" r:id="rId12"/>
-    <p:sldId id="270" r:id="rId13"/>
-    <p:sldId id="271" r:id="rId14"/>
-    <p:sldId id="275" r:id="rId15"/>
-    <p:sldId id="277" r:id="rId16"/>
-    <p:sldId id="278" r:id="rId17"/>
-    <p:sldId id="289" r:id="rId18"/>
-    <p:sldId id="280" r:id="rId19"/>
-    <p:sldId id="281" r:id="rId20"/>
-    <p:sldId id="285" r:id="rId21"/>
+    <p:sldId id="271" r:id="rId13"/>
+    <p:sldId id="275" r:id="rId14"/>
+    <p:sldId id="277" r:id="rId15"/>
+    <p:sldId id="289" r:id="rId16"/>
+    <p:sldId id="281" r:id="rId17"/>
+    <p:sldId id="285" r:id="rId18"/>
   </p:sldIdLst>
   <p:sldSz cx="12192000" cy="6858000"/>
   <p:notesSz cx="6858000" cy="9144000"/>
@@ -216,7 +213,7 @@
           <a:p>
             <a:fld id="{FF5685EE-3D40-0A4E-BB88-46887330FC0A}" type="datetimeFigureOut">
               <a:rPr lang="en-US" smtClean="0"/>
-              <a:t>2/18/26</a:t>
+              <a:t>2/25/26</a:t>
             </a:fld>
             <a:endParaRPr lang="en-US"/>
           </a:p>
@@ -718,7 +715,18 @@
           <a:bodyPr/>
           <a:lstStyle/>
           <a:p>
-            <a:endParaRPr lang="en-US"/>
+            <a:r>
+              <a:rPr lang="en-US"/>
+              <a:t>Do not modify the notes in this section to avoid tampering with the Poll Everywhere activity.
+More info at polleverywhere.com/support
+Suppose we are in the middle of a forward pass. The input x and current weights result in a pre-activation at h_2 of z_2 = -1.5. Click on the single node that is preventing any gradient information from flowing back to its connected input weights</a:t>
+            </a:r>
+          </a:p>
+          <a:p>
+            <a:r>
+              <a:rPr lang="en-US"/>
+              <a:t>https://www.polleverywhere.com/clickable_images/yRk7j8s6JV63O3Z1SD3Is</a:t>
+            </a:r>
           </a:p>
         </p:txBody>
       </p:sp>
@@ -739,102 +747,7 @@
           <a:p>
             <a:fld id="{30752F2A-FA59-1746-ABA5-28C394E5ED08}" type="slidenum">
               <a:rPr lang="en-US" smtClean="0"/>
-              <a:t>16</a:t>
-            </a:fld>
-            <a:endParaRPr lang="en-US"/>
-          </a:p>
-        </p:txBody>
-      </p:sp>
-    </p:spTree>
-    <p:extLst>
-      <p:ext uri="{BB962C8B-B14F-4D97-AF65-F5344CB8AC3E}">
-        <p14:creationId xmlns:p14="http://schemas.microsoft.com/office/powerpoint/2010/main" val="2814735115"/>
-      </p:ext>
-    </p:extLst>
-  </p:cSld>
-  <p:clrMapOvr>
-    <a:masterClrMapping/>
-  </p:clrMapOvr>
-</p:notes>
-</file>
-
-<file path=ppt/notesSlides/notesSlide4.xml><?xml version="1.0" encoding="utf-8"?>
-<p:notes xmlns:a="http://schemas.openxmlformats.org/drawingml/2006/main" xmlns:r="http://schemas.openxmlformats.org/officeDocument/2006/relationships" xmlns:p="http://schemas.openxmlformats.org/presentationml/2006/main">
-  <p:cSld>
-    <p:spTree>
-      <p:nvGrpSpPr>
-        <p:cNvPr id="1" name=""/>
-        <p:cNvGrpSpPr/>
-        <p:nvPr/>
-      </p:nvGrpSpPr>
-      <p:grpSpPr>
-        <a:xfrm>
-          <a:off x="0" y="0"/>
-          <a:ext cx="0" cy="0"/>
-          <a:chOff x="0" y="0"/>
-          <a:chExt cx="0" cy="0"/>
-        </a:xfrm>
-      </p:grpSpPr>
-      <p:sp>
-        <p:nvSpPr>
-          <p:cNvPr id="2" name="Slide Image Placeholder 1"/>
-          <p:cNvSpPr>
-            <a:spLocks noGrp="1" noRot="1" noChangeAspect="1"/>
-          </p:cNvSpPr>
-          <p:nvPr>
-            <p:ph type="sldImg"/>
-          </p:nvPr>
-        </p:nvSpPr>
-        <p:spPr/>
-      </p:sp>
-      <p:sp>
-        <p:nvSpPr>
-          <p:cNvPr id="3" name="Notes Placeholder 2"/>
-          <p:cNvSpPr>
-            <a:spLocks noGrp="1"/>
-          </p:cNvSpPr>
-          <p:nvPr>
-            <p:ph type="body" idx="1"/>
-          </p:nvPr>
-        </p:nvSpPr>
-        <p:spPr/>
-        <p:txBody>
-          <a:bodyPr/>
-          <a:lstStyle/>
-          <a:p>
-            <a:r>
-              <a:rPr lang="en-US"/>
-              <a:t>Do not modify the notes in this section to avoid tampering with the Poll Everywhere activity.
-More info at polleverywhere.com/support
-Suppose we are in the middle of a forward pass. The input x and current weights result in a pre-activation at h_2 of z_2 = -1.5. Click on the single node that is preventing any gradient information from flowing back to its connected input weights</a:t>
-            </a:r>
-          </a:p>
-          <a:p>
-            <a:r>
-              <a:rPr lang="en-US"/>
-              <a:t>https://www.polleverywhere.com/clickable_images/yRk7j8s6JV63O3Z1SD3Is</a:t>
-            </a:r>
-          </a:p>
-        </p:txBody>
-      </p:sp>
-      <p:sp>
-        <p:nvSpPr>
-          <p:cNvPr id="4" name="Slide Number Placeholder 3"/>
-          <p:cNvSpPr>
-            <a:spLocks noGrp="1"/>
-          </p:cNvSpPr>
-          <p:nvPr>
-            <p:ph type="sldNum" sz="quarter" idx="5"/>
-          </p:nvPr>
-        </p:nvSpPr>
-        <p:spPr/>
-        <p:txBody>
-          <a:bodyPr/>
-          <a:lstStyle/>
-          <a:p>
-            <a:fld id="{30752F2A-FA59-1746-ABA5-28C394E5ED08}" type="slidenum">
-              <a:rPr lang="en-US" smtClean="0"/>
-              <a:t>17</a:t>
+              <a:t>15</a:t>
             </a:fld>
             <a:endParaRPr lang="en-US"/>
           </a:p>
@@ -967,7 +880,7 @@
             <a:fld id="{16F2FB5F-D553-C945-B874-A642CC0C851F}" type="datetime3">
               <a:rPr lang="en-IE" smtClean="0"/>
               <a:pPr/>
-              <a:t>18 February 2026</a:t>
+              <a:t>25 February 2026</a:t>
             </a:fld>
             <a:endParaRPr lang="en-US" dirty="0"/>
           </a:p>
@@ -1827,7 +1740,7 @@
           <a:p>
             <a:fld id="{C1B28D5F-B017-3B47-9775-DA319F6143FF}" type="datetime3">
               <a:rPr lang="en-IE" smtClean="0"/>
-              <a:t>18 February 2026</a:t>
+              <a:t>25 February 2026</a:t>
             </a:fld>
             <a:endParaRPr lang="en-US" dirty="0"/>
           </a:p>
@@ -2048,7 +1961,7 @@
             <a:fld id="{16F2FB5F-D553-C945-B874-A642CC0C851F}" type="datetime3">
               <a:rPr lang="en-IE" smtClean="0"/>
               <a:pPr/>
-              <a:t>18 February 2026</a:t>
+              <a:t>25 February 2026</a:t>
             </a:fld>
             <a:endParaRPr lang="en-US" dirty="0"/>
           </a:p>
@@ -2323,7 +2236,7 @@
             <a:fld id="{16F2FB5F-D553-C945-B874-A642CC0C851F}" type="datetime3">
               <a:rPr lang="en-IE" smtClean="0"/>
               <a:pPr/>
-              <a:t>18 February 2026</a:t>
+              <a:t>25 February 2026</a:t>
             </a:fld>
             <a:endParaRPr lang="en-US" dirty="0"/>
           </a:p>
@@ -2498,7 +2411,7 @@
           <a:p>
             <a:fld id="{BEF41344-4D35-F145-B477-F6239A2130EE}" type="datetime3">
               <a:rPr lang="en-IE" smtClean="0"/>
-              <a:t>18 February 2026</a:t>
+              <a:t>25 February 2026</a:t>
             </a:fld>
             <a:endParaRPr lang="en-US"/>
           </a:p>
@@ -2774,7 +2687,7 @@
           <a:p>
             <a:fld id="{07196900-CA2A-2D43-9641-C5C0DD2D22D3}" type="datetime3">
               <a:rPr lang="en-IE" smtClean="0"/>
-              <a:t>18 February 2026</a:t>
+              <a:t>25 February 2026</a:t>
             </a:fld>
             <a:endParaRPr lang="en-US"/>
           </a:p>
@@ -3042,7 +2955,7 @@
           <a:p>
             <a:fld id="{8AB1A910-F8E0-D541-83F2-2CFD6E718762}" type="datetime3">
               <a:rPr lang="en-IE" smtClean="0"/>
-              <a:t>18 February 2026</a:t>
+              <a:t>25 February 2026</a:t>
             </a:fld>
             <a:endParaRPr lang="en-US"/>
           </a:p>
@@ -3184,7 +3097,7 @@
           <a:p>
             <a:fld id="{7E245B59-D3F3-5B43-BDD1-6C7B7CFD2AA6}" type="datetime3">
               <a:rPr lang="en-IE" smtClean="0"/>
-              <a:t>18 February 2026</a:t>
+              <a:t>25 February 2026</a:t>
             </a:fld>
             <a:endParaRPr lang="en-US"/>
           </a:p>
@@ -3297,7 +3210,7 @@
           <a:p>
             <a:fld id="{AD77DDCF-3644-8C44-AE36-2C59F897E125}" type="datetime3">
               <a:rPr lang="en-IE" smtClean="0"/>
-              <a:t>18 February 2026</a:t>
+              <a:t>25 February 2026</a:t>
             </a:fld>
             <a:endParaRPr lang="en-US"/>
           </a:p>
@@ -3708,7 +3621,7 @@
           <a:p>
             <a:fld id="{C1B28D5F-B017-3B47-9775-DA319F6143FF}" type="datetime3">
               <a:rPr lang="en-IE" smtClean="0"/>
-              <a:t>18 February 2026</a:t>
+              <a:t>25 February 2026</a:t>
             </a:fld>
             <a:endParaRPr lang="en-US" dirty="0"/>
           </a:p>
@@ -4632,7 +4545,7 @@
           <a:lstStyle/>
           <a:p>
             <a:r>
-              <a:t>Summary of Epoch 1</a:t>
+              <a:t>Epoch 2 – Forward Again</a:t>
             </a:r>
           </a:p>
         </p:txBody>
@@ -4654,34 +4567,54 @@
           <a:p>
             <a:r>
               <a:rPr dirty="0"/>
-              <a:t>Forward pass completed with initialized weights</a:t>
+              <a:t>Run forward pass with updated weights</a:t>
             </a:r>
           </a:p>
           <a:p>
             <a:r>
               <a:rPr dirty="0"/>
-              <a:t>Loss computed from output prediction</a:t>
+              <a:t>Compute new hidden activations and output</a:t>
             </a:r>
           </a:p>
           <a:p>
             <a:r>
               <a:rPr dirty="0"/>
-              <a:t>Backward pass adjusted weights toward target</a:t>
-            </a:r>
-          </a:p>
-          <a:p>
+              <a:t>Expect output closer to target = 1</a:t>
+            </a:r>
+          </a:p>
+          <a:p>
+            <a:r>
+              <a:rPr dirty="0" err="1"/>
+              <a:t>ReLU</a:t>
+            </a:r>
+            <a:r>
+              <a:rPr dirty="0"/>
+              <a:t> and Sigmoid continue to </a:t>
+            </a:r>
             <a:r>
               <a:rPr lang="en-IE" dirty="0"/>
-              <a:t>R</a:t>
-            </a:r>
-            <a:r>
-              <a:rPr dirty="0" err="1"/>
-              <a:t>esults</a:t>
+              <a:t>change</a:t>
             </a:r>
             <a:r>
               <a:rPr dirty="0"/>
-              <a:t> in noticeable parameter changes</a:t>
-            </a:r>
+              <a:t> values</a:t>
+            </a:r>
+            <a:endParaRPr lang="en-IE" dirty="0"/>
+          </a:p>
+          <a:p>
+            <a:r>
+              <a:rPr lang="en-IE" dirty="0">
+                <a:solidFill>
+                  <a:srgbClr val="009749"/>
+                </a:solidFill>
+              </a:rPr>
+              <a:t>Go through epoch 2 on the board</a:t>
+            </a:r>
+            <a:endParaRPr dirty="0">
+              <a:solidFill>
+                <a:srgbClr val="009749"/>
+              </a:solidFill>
+            </a:endParaRPr>
           </a:p>
         </p:txBody>
       </p:sp>
@@ -4690,7 +4623,7 @@
           <p:cNvPr id="4" name="Slide Number Placeholder 3">
             <a:extLst>
               <a:ext uri="{FF2B5EF4-FFF2-40B4-BE49-F238E27FC236}">
-                <a16:creationId xmlns:a16="http://schemas.microsoft.com/office/drawing/2014/main" id="{CA5393E1-7D58-1AFF-A718-BFDEAE37F0AD}"/>
+                <a16:creationId xmlns:a16="http://schemas.microsoft.com/office/drawing/2014/main" id="{FC36B4C2-EA69-BED9-D394-29C8ADA1CE64}"/>
               </a:ext>
             </a:extLst>
           </p:cNvPr>
@@ -4755,7 +4688,7 @@
           <a:lstStyle/>
           <a:p>
             <a:r>
-              <a:t>Epoch 2 – Forward Again</a:t>
+              <a:t>Summary of Epoch 2</a:t>
             </a:r>
           </a:p>
         </p:txBody>
@@ -4777,54 +4710,26 @@
           <a:p>
             <a:r>
               <a:rPr dirty="0"/>
-              <a:t>Run forward pass with updated weights</a:t>
+              <a:t>Output moved closer to 1</a:t>
             </a:r>
           </a:p>
           <a:p>
             <a:r>
               <a:rPr dirty="0"/>
-              <a:t>Compute new hidden activations and output</a:t>
+              <a:t>Loss dropped compared to Epoch 1</a:t>
             </a:r>
           </a:p>
           <a:p>
             <a:r>
               <a:rPr dirty="0"/>
-              <a:t>Expect output closer to target = 1</a:t>
-            </a:r>
-          </a:p>
-          <a:p>
-            <a:r>
-              <a:rPr dirty="0" err="1"/>
-              <a:t>ReLU</a:t>
-            </a:r>
+              <a:t>Learning rate was effective</a:t>
+            </a:r>
+          </a:p>
+          <a:p>
             <a:r>
               <a:rPr dirty="0"/>
-              <a:t> and Sigmoid continue to </a:t>
-            </a:r>
-            <a:r>
-              <a:rPr lang="en-IE" dirty="0"/>
-              <a:t>change</a:t>
-            </a:r>
-            <a:r>
-              <a:rPr dirty="0"/>
-              <a:t> values</a:t>
-            </a:r>
-            <a:endParaRPr lang="en-IE" dirty="0"/>
-          </a:p>
-          <a:p>
-            <a:r>
-              <a:rPr lang="en-IE" dirty="0">
-                <a:solidFill>
-                  <a:srgbClr val="009749"/>
-                </a:solidFill>
-              </a:rPr>
-              <a:t>Go through epoch 2 on the board</a:t>
-            </a:r>
-            <a:endParaRPr dirty="0">
-              <a:solidFill>
-                <a:srgbClr val="009749"/>
-              </a:solidFill>
-            </a:endParaRPr>
+              <a:t>Track all parameter values again</a:t>
+            </a:r>
           </a:p>
         </p:txBody>
       </p:sp>
@@ -4833,7 +4738,7 @@
           <p:cNvPr id="4" name="Slide Number Placeholder 3">
             <a:extLst>
               <a:ext uri="{FF2B5EF4-FFF2-40B4-BE49-F238E27FC236}">
-                <a16:creationId xmlns:a16="http://schemas.microsoft.com/office/drawing/2014/main" id="{FC36B4C2-EA69-BED9-D394-29C8ADA1CE64}"/>
+                <a16:creationId xmlns:a16="http://schemas.microsoft.com/office/drawing/2014/main" id="{7EF7F5F1-4A8F-4E77-13FB-749F18DBE95F}"/>
               </a:ext>
             </a:extLst>
           </p:cNvPr>
@@ -4898,121 +4803,6 @@
           <a:lstStyle/>
           <a:p>
             <a:r>
-              <a:t>Summary of Epoch 2</a:t>
-            </a:r>
-          </a:p>
-        </p:txBody>
-      </p:sp>
-      <p:sp>
-        <p:nvSpPr>
-          <p:cNvPr id="3" name="Content Placeholder 2"/>
-          <p:cNvSpPr>
-            <a:spLocks noGrp="1"/>
-          </p:cNvSpPr>
-          <p:nvPr>
-            <p:ph idx="1"/>
-          </p:nvPr>
-        </p:nvSpPr>
-        <p:spPr/>
-        <p:txBody>
-          <a:bodyPr/>
-          <a:lstStyle/>
-          <a:p>
-            <a:r>
-              <a:rPr dirty="0"/>
-              <a:t>Output moved closer to 1</a:t>
-            </a:r>
-          </a:p>
-          <a:p>
-            <a:r>
-              <a:rPr dirty="0"/>
-              <a:t>Loss dropped compared to Epoch 1</a:t>
-            </a:r>
-          </a:p>
-          <a:p>
-            <a:r>
-              <a:rPr dirty="0"/>
-              <a:t>Learning rate was effective</a:t>
-            </a:r>
-          </a:p>
-          <a:p>
-            <a:r>
-              <a:rPr dirty="0"/>
-              <a:t>Track all parameter values again</a:t>
-            </a:r>
-          </a:p>
-        </p:txBody>
-      </p:sp>
-      <p:sp>
-        <p:nvSpPr>
-          <p:cNvPr id="4" name="Slide Number Placeholder 3">
-            <a:extLst>
-              <a:ext uri="{FF2B5EF4-FFF2-40B4-BE49-F238E27FC236}">
-                <a16:creationId xmlns:a16="http://schemas.microsoft.com/office/drawing/2014/main" id="{7EF7F5F1-4A8F-4E77-13FB-749F18DBE95F}"/>
-              </a:ext>
-            </a:extLst>
-          </p:cNvPr>
-          <p:cNvSpPr>
-            <a:spLocks noGrp="1"/>
-          </p:cNvSpPr>
-          <p:nvPr>
-            <p:ph type="sldNum" sz="quarter" idx="12"/>
-          </p:nvPr>
-        </p:nvSpPr>
-        <p:spPr/>
-        <p:txBody>
-          <a:bodyPr/>
-          <a:lstStyle/>
-          <a:p>
-            <a:fld id="{8E65201D-48DB-3B45-ABC2-018B1E66F34C}" type="slidenum">
-              <a:rPr lang="en-US" smtClean="0"/>
-              <a:t>14</a:t>
-            </a:fld>
-            <a:endParaRPr lang="en-US"/>
-          </a:p>
-        </p:txBody>
-      </p:sp>
-    </p:spTree>
-  </p:cSld>
-  <p:clrMapOvr>
-    <a:masterClrMapping/>
-  </p:clrMapOvr>
-</p:sld>
-</file>
-
-<file path=ppt/slides/slide15.xml><?xml version="1.0" encoding="utf-8"?>
-<p:sld xmlns:a="http://schemas.openxmlformats.org/drawingml/2006/main" xmlns:r="http://schemas.openxmlformats.org/officeDocument/2006/relationships" xmlns:p="http://schemas.openxmlformats.org/presentationml/2006/main">
-  <p:cSld>
-    <p:spTree>
-      <p:nvGrpSpPr>
-        <p:cNvPr id="1" name=""/>
-        <p:cNvGrpSpPr/>
-        <p:nvPr/>
-      </p:nvGrpSpPr>
-      <p:grpSpPr>
-        <a:xfrm>
-          <a:off x="0" y="0"/>
-          <a:ext cx="0" cy="0"/>
-          <a:chOff x="0" y="0"/>
-          <a:chExt cx="0" cy="0"/>
-        </a:xfrm>
-      </p:grpSpPr>
-      <p:sp>
-        <p:nvSpPr>
-          <p:cNvPr id="2" name="Title 1"/>
-          <p:cNvSpPr>
-            <a:spLocks noGrp="1"/>
-          </p:cNvSpPr>
-          <p:nvPr>
-            <p:ph type="title"/>
-          </p:nvPr>
-        </p:nvSpPr>
-        <p:spPr/>
-        <p:txBody>
-          <a:bodyPr/>
-          <a:lstStyle/>
-          <a:p>
-            <a:r>
               <a:t>Compare Epochs – Learning Trace</a:t>
             </a:r>
           </a:p>
@@ -5121,7 +4911,7 @@
           <a:p>
             <a:fld id="{8E65201D-48DB-3B45-ABC2-018B1E66F34C}" type="slidenum">
               <a:rPr lang="en-US" smtClean="0"/>
-              <a:t>15</a:t>
+              <a:t>14</a:t>
             </a:fld>
             <a:endParaRPr lang="en-US"/>
           </a:p>
@@ -5135,196 +4925,7 @@
 </p:sld>
 </file>
 
-<file path=ppt/slides/slide16.xml><?xml version="1.0" encoding="utf-8"?>
-<p:sld xmlns:a="http://schemas.openxmlformats.org/drawingml/2006/main" xmlns:r="http://schemas.openxmlformats.org/officeDocument/2006/relationships" xmlns:p="http://schemas.openxmlformats.org/presentationml/2006/main">
-  <p:cSld>
-    <p:spTree>
-      <p:nvGrpSpPr>
-        <p:cNvPr id="1" name=""/>
-        <p:cNvGrpSpPr/>
-        <p:nvPr/>
-      </p:nvGrpSpPr>
-      <p:grpSpPr>
-        <a:xfrm>
-          <a:off x="0" y="0"/>
-          <a:ext cx="0" cy="0"/>
-          <a:chOff x="0" y="0"/>
-          <a:chExt cx="0" cy="0"/>
-        </a:xfrm>
-      </p:grpSpPr>
-      <p:sp>
-        <p:nvSpPr>
-          <p:cNvPr id="2" name="Title 1"/>
-          <p:cNvSpPr>
-            <a:spLocks noGrp="1"/>
-          </p:cNvSpPr>
-          <p:nvPr>
-            <p:ph type="title"/>
-          </p:nvPr>
-        </p:nvSpPr>
-        <p:spPr/>
-        <p:txBody>
-          <a:bodyPr/>
-          <a:lstStyle/>
-          <a:p>
-            <a:r>
-              <a:t>Summary – What the Network Learned</a:t>
-            </a:r>
-          </a:p>
-        </p:txBody>
-      </p:sp>
-      <mc:AlternateContent xmlns:mc="http://schemas.openxmlformats.org/markup-compatibility/2006">
-        <mc:Choice xmlns:a14="http://schemas.microsoft.com/office/drawing/2010/main" Requires="a14">
-          <p:sp>
-            <p:nvSpPr>
-              <p:cNvPr id="3" name="Content Placeholder 2"/>
-              <p:cNvSpPr>
-                <a:spLocks noGrp="1"/>
-              </p:cNvSpPr>
-              <p:nvPr>
-                <p:ph idx="1"/>
-              </p:nvPr>
-            </p:nvSpPr>
-            <p:spPr/>
-            <p:txBody>
-              <a:bodyPr/>
-              <a:lstStyle/>
-              <a:p>
-                <a:r>
-                  <a:rPr lang="en-IE" dirty="0"/>
-                  <a:t>Hidden neuron 1 became active for [1,0,1]</a:t>
-                </a:r>
-              </a:p>
-              <a:p>
-                <a:r>
-                  <a:rPr lang="en-IE" dirty="0"/>
-                  <a:t>(Thus could ‘feature detect’ an important meteorological aspect of the data)</a:t>
-                </a:r>
-              </a:p>
-              <a:p>
-                <a:r>
-                  <a:rPr lang="en-IE" dirty="0"/>
-                  <a:t>Its weights increased to drive output up</a:t>
-                </a:r>
-              </a:p>
-              <a:p>
-                <a:r>
-                  <a:rPr lang="en-IE" dirty="0"/>
-                  <a:t>Output weights were tuned to emphasize </a:t>
-                </a:r>
-                <a14:m>
-                  <m:oMath xmlns:m="http://schemas.openxmlformats.org/officeDocument/2006/math">
-                    <m:sSub>
-                      <m:sSubPr>
-                        <m:ctrlPr>
-                          <a:rPr lang="en-IE" b="0" i="1" dirty="0" smtClean="0">
-                            <a:latin typeface="Cambria Math" panose="02040503050406030204" pitchFamily="18" charset="0"/>
-                          </a:rPr>
-                        </m:ctrlPr>
-                      </m:sSubPr>
-                      <m:e>
-                        <m:r>
-                          <a:rPr lang="en-IE" i="1" dirty="0" smtClean="0">
-                            <a:latin typeface="Cambria Math" panose="02040503050406030204" pitchFamily="18" charset="0"/>
-                          </a:rPr>
-                          <m:t>h</m:t>
-                        </m:r>
-                      </m:e>
-                      <m:sub>
-                        <m:r>
-                          <a:rPr lang="en-IE" i="1" dirty="0" smtClean="0">
-                            <a:latin typeface="Cambria Math" panose="02040503050406030204" pitchFamily="18" charset="0"/>
-                          </a:rPr>
-                          <m:t>1</m:t>
-                        </m:r>
-                      </m:sub>
-                    </m:sSub>
-                  </m:oMath>
-                </a14:m>
-                <a:endParaRPr lang="en-IE" dirty="0"/>
-              </a:p>
-              <a:p>
-                <a:r>
-                  <a:rPr lang="en-IE" dirty="0"/>
-                  <a:t>Biases adjusted to support activation</a:t>
-                </a:r>
-                <a:endParaRPr dirty="0"/>
-              </a:p>
-            </p:txBody>
-          </p:sp>
-        </mc:Choice>
-        <mc:Fallback>
-          <p:sp>
-            <p:nvSpPr>
-              <p:cNvPr id="3" name="Content Placeholder 2"/>
-              <p:cNvSpPr>
-                <a:spLocks noGrp="1" noRot="1" noChangeAspect="1" noMove="1" noResize="1" noEditPoints="1" noAdjustHandles="1" noChangeArrowheads="1" noChangeShapeType="1" noTextEdit="1"/>
-              </p:cNvSpPr>
-              <p:nvPr>
-                <p:ph idx="1"/>
-              </p:nvPr>
-            </p:nvSpPr>
-            <p:spPr>
-              <a:blipFill>
-                <a:blip r:embed="rId3"/>
-                <a:stretch>
-                  <a:fillRect l="-1368" t="-2439"/>
-                </a:stretch>
-              </a:blipFill>
-            </p:spPr>
-            <p:txBody>
-              <a:bodyPr/>
-              <a:lstStyle/>
-              <a:p>
-                <a:r>
-                  <a:rPr lang="en-US">
-                    <a:noFill/>
-                  </a:rPr>
-                  <a:t> </a:t>
-                </a:r>
-              </a:p>
-            </p:txBody>
-          </p:sp>
-        </mc:Fallback>
-      </mc:AlternateContent>
-      <p:sp>
-        <p:nvSpPr>
-          <p:cNvPr id="4" name="Slide Number Placeholder 3">
-            <a:extLst>
-              <a:ext uri="{FF2B5EF4-FFF2-40B4-BE49-F238E27FC236}">
-                <a16:creationId xmlns:a16="http://schemas.microsoft.com/office/drawing/2014/main" id="{CF46E8C7-BF5E-A6CB-7923-6D53DB1B8C35}"/>
-              </a:ext>
-            </a:extLst>
-          </p:cNvPr>
-          <p:cNvSpPr>
-            <a:spLocks noGrp="1"/>
-          </p:cNvSpPr>
-          <p:nvPr>
-            <p:ph type="sldNum" sz="quarter" idx="12"/>
-          </p:nvPr>
-        </p:nvSpPr>
-        <p:spPr/>
-        <p:txBody>
-          <a:bodyPr/>
-          <a:lstStyle/>
-          <a:p>
-            <a:fld id="{8E65201D-48DB-3B45-ABC2-018B1E66F34C}" type="slidenum">
-              <a:rPr lang="en-US" smtClean="0"/>
-              <a:t>16</a:t>
-            </a:fld>
-            <a:endParaRPr lang="en-US"/>
-          </a:p>
-        </p:txBody>
-      </p:sp>
-    </p:spTree>
-  </p:cSld>
-  <p:clrMapOvr>
-    <a:masterClrMapping/>
-  </p:clrMapOvr>
-</p:sld>
-</file>
-
-<file path=ppt/slides/slide17.xml><?xml version="1.0" encoding="utf-8"?>
+<file path=ppt/slides/slide15.xml><?xml version="1.0" encoding="utf-8"?>
 <p:sld xmlns:a="http://schemas.openxmlformats.org/drawingml/2006/main" xmlns:r="http://schemas.openxmlformats.org/officeDocument/2006/relationships" xmlns:p="http://schemas.openxmlformats.org/presentationml/2006/main">
   <p:cSld>
     <p:spTree>
@@ -5414,7 +5015,7 @@
           <a:p>
             <a:fld id="{C1B28D5F-B017-3B47-9775-DA319F6143FF}" type="datetime3">
               <a:rPr lang="en-IE" smtClean="0"/>
-              <a:t>18 February 2026</a:t>
+              <a:t>25 February 2026</a:t>
             </a:fld>
             <a:endParaRPr lang="en-US" dirty="0"/>
           </a:p>
@@ -5463,7 +5064,7 @@
 </p:sld>
 </file>
 
-<file path=ppt/slides/slide18.xml><?xml version="1.0" encoding="utf-8"?>
+<file path=ppt/slides/slide16.xml><?xml version="1.0" encoding="utf-8"?>
 <p:sld xmlns:a="http://schemas.openxmlformats.org/drawingml/2006/main" xmlns:r="http://schemas.openxmlformats.org/officeDocument/2006/relationships" xmlns:p="http://schemas.openxmlformats.org/presentationml/2006/main">
   <p:cSld>
     <p:spTree>
@@ -5496,126 +5097,6 @@
           <a:lstStyle/>
           <a:p>
             <a:r>
-              <a:rPr dirty="0"/>
-              <a:t>Common Mistakes</a:t>
-            </a:r>
-          </a:p>
-        </p:txBody>
-      </p:sp>
-      <p:sp>
-        <p:nvSpPr>
-          <p:cNvPr id="3" name="Content Placeholder 2"/>
-          <p:cNvSpPr>
-            <a:spLocks noGrp="1"/>
-          </p:cNvSpPr>
-          <p:nvPr>
-            <p:ph idx="1"/>
-          </p:nvPr>
-        </p:nvSpPr>
-        <p:spPr/>
-        <p:txBody>
-          <a:bodyPr/>
-          <a:lstStyle/>
-          <a:p>
-            <a:r>
-              <a:rPr dirty="0"/>
-              <a:t>Forgetting to apply bias before activation</a:t>
-            </a:r>
-          </a:p>
-          <a:p>
-            <a:r>
-              <a:rPr dirty="0"/>
-              <a:t>Mislabeling the sign of gradient updates</a:t>
-            </a:r>
-          </a:p>
-          <a:p>
-            <a:r>
-              <a:rPr dirty="0"/>
-              <a:t>Applying activation at wrong stage</a:t>
-            </a:r>
-          </a:p>
-          <a:p>
-            <a:r>
-              <a:rPr dirty="0" err="1"/>
-              <a:t>ReLU</a:t>
-            </a:r>
-            <a:r>
-              <a:rPr dirty="0"/>
-              <a:t> 'zero-out' not handled correctly</a:t>
-            </a:r>
-          </a:p>
-        </p:txBody>
-      </p:sp>
-      <p:sp>
-        <p:nvSpPr>
-          <p:cNvPr id="4" name="Slide Number Placeholder 3">
-            <a:extLst>
-              <a:ext uri="{FF2B5EF4-FFF2-40B4-BE49-F238E27FC236}">
-                <a16:creationId xmlns:a16="http://schemas.microsoft.com/office/drawing/2014/main" id="{18DE7DBF-4153-BEE3-68B1-9CEB810B3E24}"/>
-              </a:ext>
-            </a:extLst>
-          </p:cNvPr>
-          <p:cNvSpPr>
-            <a:spLocks noGrp="1"/>
-          </p:cNvSpPr>
-          <p:nvPr>
-            <p:ph type="sldNum" sz="quarter" idx="12"/>
-          </p:nvPr>
-        </p:nvSpPr>
-        <p:spPr/>
-        <p:txBody>
-          <a:bodyPr/>
-          <a:lstStyle/>
-          <a:p>
-            <a:fld id="{8E65201D-48DB-3B45-ABC2-018B1E66F34C}" type="slidenum">
-              <a:rPr lang="en-US" smtClean="0"/>
-              <a:t>18</a:t>
-            </a:fld>
-            <a:endParaRPr lang="en-US"/>
-          </a:p>
-        </p:txBody>
-      </p:sp>
-    </p:spTree>
-  </p:cSld>
-  <p:clrMapOvr>
-    <a:masterClrMapping/>
-  </p:clrMapOvr>
-</p:sld>
-</file>
-
-<file path=ppt/slides/slide19.xml><?xml version="1.0" encoding="utf-8"?>
-<p:sld xmlns:a="http://schemas.openxmlformats.org/drawingml/2006/main" xmlns:r="http://schemas.openxmlformats.org/officeDocument/2006/relationships" xmlns:p="http://schemas.openxmlformats.org/presentationml/2006/main">
-  <p:cSld>
-    <p:spTree>
-      <p:nvGrpSpPr>
-        <p:cNvPr id="1" name=""/>
-        <p:cNvGrpSpPr/>
-        <p:nvPr/>
-      </p:nvGrpSpPr>
-      <p:grpSpPr>
-        <a:xfrm>
-          <a:off x="0" y="0"/>
-          <a:ext cx="0" cy="0"/>
-          <a:chOff x="0" y="0"/>
-          <a:chExt cx="0" cy="0"/>
-        </a:xfrm>
-      </p:grpSpPr>
-      <p:sp>
-        <p:nvSpPr>
-          <p:cNvPr id="2" name="Title 1"/>
-          <p:cNvSpPr>
-            <a:spLocks noGrp="1"/>
-          </p:cNvSpPr>
-          <p:nvPr>
-            <p:ph type="title"/>
-          </p:nvPr>
-        </p:nvSpPr>
-        <p:spPr/>
-        <p:txBody>
-          <a:bodyPr/>
-          <a:lstStyle/>
-          <a:p>
-            <a:r>
               <a:t>Practice Suggestions</a:t>
             </a:r>
           </a:p>
@@ -5704,13 +5185,123 @@
           <a:p>
             <a:fld id="{8E65201D-48DB-3B45-ABC2-018B1E66F34C}" type="slidenum">
               <a:rPr lang="en-US" smtClean="0"/>
-              <a:t>19</a:t>
+              <a:t>16</a:t>
             </a:fld>
             <a:endParaRPr lang="en-US"/>
           </a:p>
         </p:txBody>
       </p:sp>
     </p:spTree>
+  </p:cSld>
+  <p:clrMapOvr>
+    <a:masterClrMapping/>
+  </p:clrMapOvr>
+</p:sld>
+</file>
+
+<file path=ppt/slides/slide17.xml><?xml version="1.0" encoding="utf-8"?>
+<p:sld xmlns:a="http://schemas.openxmlformats.org/drawingml/2006/main" xmlns:r="http://schemas.openxmlformats.org/officeDocument/2006/relationships" xmlns:p="http://schemas.openxmlformats.org/presentationml/2006/main">
+  <p:cSld>
+    <p:spTree>
+      <p:nvGrpSpPr>
+        <p:cNvPr id="1" name=""/>
+        <p:cNvGrpSpPr/>
+        <p:nvPr/>
+      </p:nvGrpSpPr>
+      <p:grpSpPr>
+        <a:xfrm>
+          <a:off x="0" y="0"/>
+          <a:ext cx="0" cy="0"/>
+          <a:chOff x="0" y="0"/>
+          <a:chExt cx="0" cy="0"/>
+        </a:xfrm>
+      </p:grpSpPr>
+      <p:sp>
+        <p:nvSpPr>
+          <p:cNvPr id="2" name="Title 1">
+            <a:extLst>
+              <a:ext uri="{FF2B5EF4-FFF2-40B4-BE49-F238E27FC236}">
+                <a16:creationId xmlns:a16="http://schemas.microsoft.com/office/drawing/2014/main" id="{5052E3C7-E02A-F443-93FF-99B0D12844EC}"/>
+              </a:ext>
+            </a:extLst>
+          </p:cNvPr>
+          <p:cNvSpPr>
+            <a:spLocks noGrp="1"/>
+          </p:cNvSpPr>
+          <p:nvPr>
+            <p:ph type="title"/>
+          </p:nvPr>
+        </p:nvSpPr>
+        <p:spPr/>
+        <p:txBody>
+          <a:bodyPr/>
+          <a:lstStyle/>
+          <a:p>
+            <a:r>
+              <a:rPr lang="en-US" dirty="0"/>
+              <a:t>Summary</a:t>
+            </a:r>
+          </a:p>
+        </p:txBody>
+      </p:sp>
+      <p:sp>
+        <p:nvSpPr>
+          <p:cNvPr id="3" name="Content Placeholder 2">
+            <a:extLst>
+              <a:ext uri="{FF2B5EF4-FFF2-40B4-BE49-F238E27FC236}">
+                <a16:creationId xmlns:a16="http://schemas.microsoft.com/office/drawing/2014/main" id="{92B1495C-38DD-F9F0-478E-D16C6E4C61EA}"/>
+              </a:ext>
+            </a:extLst>
+          </p:cNvPr>
+          <p:cNvSpPr>
+            <a:spLocks noGrp="1"/>
+          </p:cNvSpPr>
+          <p:nvPr>
+            <p:ph idx="1"/>
+          </p:nvPr>
+        </p:nvSpPr>
+        <p:spPr/>
+        <p:txBody>
+          <a:bodyPr/>
+          <a:lstStyle/>
+          <a:p>
+            <a:pPr marL="457200" indent="-457200">
+              <a:buFont typeface="Arial" panose="020B0604020202020204" pitchFamily="34" charset="0"/>
+              <a:buChar char="•"/>
+            </a:pPr>
+            <a:r>
+              <a:rPr lang="en-US" dirty="0"/>
+              <a:t>It’s a lot of work (and fiddly calculation) to go through a full forward and backward pass of even a simple NN</a:t>
+            </a:r>
+          </a:p>
+          <a:p>
+            <a:pPr marL="457200" indent="-457200">
+              <a:buFont typeface="Arial" panose="020B0604020202020204" pitchFamily="34" charset="0"/>
+              <a:buChar char="•"/>
+            </a:pPr>
+            <a:r>
+              <a:rPr lang="en-US" dirty="0"/>
+              <a:t>All the calculations though are pretty straightforward</a:t>
+            </a:r>
+          </a:p>
+          <a:p>
+            <a:pPr marL="457200" indent="-457200">
+              <a:buFont typeface="Arial" panose="020B0604020202020204" pitchFamily="34" charset="0"/>
+              <a:buChar char="•"/>
+            </a:pPr>
+            <a:r>
+              <a:rPr lang="en-US" dirty="0"/>
+              <a:t>Easy to make small mistakes. Marks given for process not accuracy</a:t>
+            </a:r>
+          </a:p>
+        </p:txBody>
+      </p:sp>
+    </p:spTree>
+    <p:extLst>
+      <p:ext uri="{BB962C8B-B14F-4D97-AF65-F5344CB8AC3E}">
+        <p14:creationId xmlns:p14="http://schemas.microsoft.com/office/powerpoint/2010/main" val="2902375257"/>
+      </p:ext>
+    </p:extLst>
   </p:cSld>
   <p:clrMapOvr>
     <a:masterClrMapping/>
@@ -5842,116 +5433,6 @@
         </p:txBody>
       </p:sp>
     </p:spTree>
-  </p:cSld>
-  <p:clrMapOvr>
-    <a:masterClrMapping/>
-  </p:clrMapOvr>
-</p:sld>
-</file>
-
-<file path=ppt/slides/slide20.xml><?xml version="1.0" encoding="utf-8"?>
-<p:sld xmlns:a="http://schemas.openxmlformats.org/drawingml/2006/main" xmlns:r="http://schemas.openxmlformats.org/officeDocument/2006/relationships" xmlns:p="http://schemas.openxmlformats.org/presentationml/2006/main">
-  <p:cSld>
-    <p:spTree>
-      <p:nvGrpSpPr>
-        <p:cNvPr id="1" name=""/>
-        <p:cNvGrpSpPr/>
-        <p:nvPr/>
-      </p:nvGrpSpPr>
-      <p:grpSpPr>
-        <a:xfrm>
-          <a:off x="0" y="0"/>
-          <a:ext cx="0" cy="0"/>
-          <a:chOff x="0" y="0"/>
-          <a:chExt cx="0" cy="0"/>
-        </a:xfrm>
-      </p:grpSpPr>
-      <p:sp>
-        <p:nvSpPr>
-          <p:cNvPr id="2" name="Title 1">
-            <a:extLst>
-              <a:ext uri="{FF2B5EF4-FFF2-40B4-BE49-F238E27FC236}">
-                <a16:creationId xmlns:a16="http://schemas.microsoft.com/office/drawing/2014/main" id="{5052E3C7-E02A-F443-93FF-99B0D12844EC}"/>
-              </a:ext>
-            </a:extLst>
-          </p:cNvPr>
-          <p:cNvSpPr>
-            <a:spLocks noGrp="1"/>
-          </p:cNvSpPr>
-          <p:nvPr>
-            <p:ph type="title"/>
-          </p:nvPr>
-        </p:nvSpPr>
-        <p:spPr/>
-        <p:txBody>
-          <a:bodyPr/>
-          <a:lstStyle/>
-          <a:p>
-            <a:r>
-              <a:rPr lang="en-US" dirty="0"/>
-              <a:t>Summary</a:t>
-            </a:r>
-          </a:p>
-        </p:txBody>
-      </p:sp>
-      <p:sp>
-        <p:nvSpPr>
-          <p:cNvPr id="3" name="Content Placeholder 2">
-            <a:extLst>
-              <a:ext uri="{FF2B5EF4-FFF2-40B4-BE49-F238E27FC236}">
-                <a16:creationId xmlns:a16="http://schemas.microsoft.com/office/drawing/2014/main" id="{92B1495C-38DD-F9F0-478E-D16C6E4C61EA}"/>
-              </a:ext>
-            </a:extLst>
-          </p:cNvPr>
-          <p:cNvSpPr>
-            <a:spLocks noGrp="1"/>
-          </p:cNvSpPr>
-          <p:nvPr>
-            <p:ph idx="1"/>
-          </p:nvPr>
-        </p:nvSpPr>
-        <p:spPr/>
-        <p:txBody>
-          <a:bodyPr/>
-          <a:lstStyle/>
-          <a:p>
-            <a:pPr marL="457200" indent="-457200">
-              <a:buFont typeface="Arial" panose="020B0604020202020204" pitchFamily="34" charset="0"/>
-              <a:buChar char="•"/>
-            </a:pPr>
-            <a:r>
-              <a:rPr lang="en-US" dirty="0"/>
-              <a:t>It’s a lot of work (and fiddly calculation) to go through a full forward and backward pass of even a simple NN</a:t>
-            </a:r>
-          </a:p>
-          <a:p>
-            <a:pPr marL="457200" indent="-457200">
-              <a:buFont typeface="Arial" panose="020B0604020202020204" pitchFamily="34" charset="0"/>
-              <a:buChar char="•"/>
-            </a:pPr>
-            <a:r>
-              <a:rPr lang="en-US" dirty="0"/>
-              <a:t>All the calculations though are pretty straightforward</a:t>
-            </a:r>
-          </a:p>
-          <a:p>
-            <a:pPr marL="457200" indent="-457200">
-              <a:buFont typeface="Arial" panose="020B0604020202020204" pitchFamily="34" charset="0"/>
-              <a:buChar char="•"/>
-            </a:pPr>
-            <a:r>
-              <a:rPr lang="en-US" dirty="0"/>
-              <a:t>Easy to make small mistakes. Marks given for process not accuracy</a:t>
-            </a:r>
-          </a:p>
-        </p:txBody>
-      </p:sp>
-    </p:spTree>
-    <p:extLst>
-      <p:ext uri="{BB962C8B-B14F-4D97-AF65-F5344CB8AC3E}">
-        <p14:creationId xmlns:p14="http://schemas.microsoft.com/office/powerpoint/2010/main" val="2902375257"/>
-      </p:ext>
-    </p:extLst>
   </p:cSld>
   <p:clrMapOvr>
     <a:masterClrMapping/>
@@ -6010,8 +5491,8 @@
           </a:p>
         </p:txBody>
       </p:sp>
-      <mc:AlternateContent xmlns:mc="http://schemas.openxmlformats.org/markup-compatibility/2006">
-        <mc:Choice xmlns:a14="http://schemas.microsoft.com/office/drawing/2010/main" Requires="a14">
+      <mc:AlternateContent xmlns:mc="http://schemas.openxmlformats.org/markup-compatibility/2006" xmlns:a14="http://schemas.microsoft.com/office/drawing/2010/main">
+        <mc:Choice Requires="a14">
           <p:sp>
             <p:nvSpPr>
               <p:cNvPr id="3" name="Content Placeholder 2"/>
@@ -6173,7 +5654,7 @@
             </p:txBody>
           </p:sp>
         </mc:Choice>
-        <mc:Fallback>
+        <mc:Fallback xmlns="">
           <p:sp>
             <p:nvSpPr>
               <p:cNvPr id="3" name="Content Placeholder 2"/>
@@ -7947,7 +7428,7 @@
           <a:p>
             <a:fld id="{C1B28D5F-B017-3B47-9775-DA319F6143FF}" type="datetime3">
               <a:rPr lang="en-IE" smtClean="0"/>
-              <a:t>18 February 2026</a:t>
+              <a:t>25 February 2026</a:t>
             </a:fld>
             <a:endParaRPr lang="en-US" dirty="0"/>
           </a:p>
@@ -11168,11 +10649,6 @@
               </a:rPr>
               <a:t>On the board: for given weights and biases compute the forward pass</a:t>
             </a:r>
-            <a:endParaRPr dirty="0">
-              <a:solidFill>
-                <a:srgbClr val="009749"/>
-              </a:solidFill>
-            </a:endParaRPr>
           </a:p>
         </p:txBody>
       </p:sp>
@@ -11272,7 +10748,7 @@
             </a:r>
             <a:r>
               <a:rPr lang="en-IE" dirty="0"/>
-              <a:t>small, but helpful if they’re non-zero.</a:t>
+              <a:t>small, but helpful if they’re non-zero</a:t>
             </a:r>
           </a:p>
           <a:p>
@@ -11280,38 +10756,23 @@
               <a:rPr dirty="0"/>
               <a:t>All biases = 0</a:t>
             </a:r>
-            <a:r>
-              <a:rPr lang="en-IE" dirty="0"/>
-              <a:t>.</a:t>
-            </a:r>
-            <a:endParaRPr dirty="0"/>
           </a:p>
           <a:p>
             <a:r>
               <a:rPr dirty="0"/>
               <a:t>Will update over training using error signal</a:t>
             </a:r>
-            <a:r>
-              <a:rPr lang="en-IE" dirty="0"/>
-              <a:t>.</a:t>
-            </a:r>
-            <a:endParaRPr dirty="0"/>
           </a:p>
           <a:p>
             <a:r>
               <a:rPr dirty="0"/>
               <a:t>Small integers make learning interpretable</a:t>
             </a:r>
-            <a:r>
-              <a:rPr lang="en-IE" dirty="0"/>
-              <a:t>.</a:t>
-            </a:r>
-            <a:endParaRPr dirty="0"/>
           </a:p>
         </p:txBody>
       </p:sp>
-      <mc:AlternateContent xmlns:mc="http://schemas.openxmlformats.org/markup-compatibility/2006">
-        <mc:Choice xmlns:a14="http://schemas.microsoft.com/office/drawing/2010/main" Requires="a14">
+      <mc:AlternateContent xmlns:mc="http://schemas.openxmlformats.org/markup-compatibility/2006" xmlns:a14="http://schemas.microsoft.com/office/drawing/2010/main">
+        <mc:Choice Requires="a14">
           <p:sp>
             <p:nvSpPr>
               <p:cNvPr id="6" name="Content Placeholder 5">
@@ -11575,7 +11036,7 @@
             </p:txBody>
           </p:sp>
         </mc:Choice>
-        <mc:Fallback>
+        <mc:Fallback xmlns="">
           <p:sp>
             <p:nvSpPr>
               <p:cNvPr id="6" name="Content Placeholder 5">
@@ -11644,6 +11105,209 @@
           </a:p>
         </p:txBody>
       </p:sp>
+      <p:sp>
+        <p:nvSpPr>
+          <p:cNvPr id="8" name="Content Placeholder 2">
+            <a:extLst>
+              <a:ext uri="{FF2B5EF4-FFF2-40B4-BE49-F238E27FC236}">
+                <a16:creationId xmlns:a16="http://schemas.microsoft.com/office/drawing/2014/main" id="{8547A921-3B49-425F-FB73-95F800D51D71}"/>
+              </a:ext>
+            </a:extLst>
+          </p:cNvPr>
+          <p:cNvSpPr txBox="1">
+            <a:spLocks/>
+          </p:cNvSpPr>
+          <p:nvPr/>
+        </p:nvSpPr>
+        <p:spPr>
+          <a:xfrm>
+            <a:off x="838200" y="5159021"/>
+            <a:ext cx="8348602" cy="815893"/>
+          </a:xfrm>
+          <a:prstGeom prst="rect">
+            <a:avLst/>
+          </a:prstGeom>
+        </p:spPr>
+        <p:txBody>
+          <a:bodyPr vert="horz" lIns="91440" tIns="45720" rIns="91440" bIns="45720" rtlCol="0">
+            <a:normAutofit lnSpcReduction="10000"/>
+          </a:bodyPr>
+          <a:lstStyle>
+            <a:lvl1pPr marL="228600" indent="-228600" algn="l" defTabSz="914400" rtl="0" eaLnBrk="1" latinLnBrk="0" hangingPunct="1">
+              <a:lnSpc>
+                <a:spcPct val="90000"/>
+              </a:lnSpc>
+              <a:spcBef>
+                <a:spcPts val="1000"/>
+              </a:spcBef>
+              <a:buFont typeface="Arial" panose="020B0604020202020204" pitchFamily="34" charset="0"/>
+              <a:buChar char="•"/>
+              <a:defRPr sz="2800" kern="1200">
+                <a:solidFill>
+                  <a:srgbClr val="00427A"/>
+                </a:solidFill>
+                <a:latin typeface="Calibri" panose="020F0502020204030204" pitchFamily="34" charset="0"/>
+                <a:ea typeface="+mn-ea"/>
+                <a:cs typeface="Calibri" panose="020F0502020204030204" pitchFamily="34" charset="0"/>
+              </a:defRPr>
+            </a:lvl1pPr>
+            <a:lvl2pPr marL="685800" indent="-228600" algn="l" defTabSz="914400" rtl="0" eaLnBrk="1" latinLnBrk="0" hangingPunct="1">
+              <a:lnSpc>
+                <a:spcPct val="90000"/>
+              </a:lnSpc>
+              <a:spcBef>
+                <a:spcPts val="500"/>
+              </a:spcBef>
+              <a:buFont typeface="Arial" panose="020B0604020202020204" pitchFamily="34" charset="0"/>
+              <a:buChar char="•"/>
+              <a:defRPr sz="2400" kern="1200">
+                <a:solidFill>
+                  <a:srgbClr val="00427A"/>
+                </a:solidFill>
+                <a:latin typeface="Calibri" panose="020F0502020204030204" pitchFamily="34" charset="0"/>
+                <a:ea typeface="+mn-ea"/>
+                <a:cs typeface="Calibri" panose="020F0502020204030204" pitchFamily="34" charset="0"/>
+              </a:defRPr>
+            </a:lvl2pPr>
+            <a:lvl3pPr marL="1143000" indent="-228600" algn="l" defTabSz="914400" rtl="0" eaLnBrk="1" latinLnBrk="0" hangingPunct="1">
+              <a:lnSpc>
+                <a:spcPct val="90000"/>
+              </a:lnSpc>
+              <a:spcBef>
+                <a:spcPts val="500"/>
+              </a:spcBef>
+              <a:buFont typeface="Arial" panose="020B0604020202020204" pitchFamily="34" charset="0"/>
+              <a:buChar char="•"/>
+              <a:defRPr sz="2000" kern="1200">
+                <a:solidFill>
+                  <a:srgbClr val="00427A"/>
+                </a:solidFill>
+                <a:latin typeface="Calibri" panose="020F0502020204030204" pitchFamily="34" charset="0"/>
+                <a:ea typeface="+mn-ea"/>
+                <a:cs typeface="Calibri" panose="020F0502020204030204" pitchFamily="34" charset="0"/>
+              </a:defRPr>
+            </a:lvl3pPr>
+            <a:lvl4pPr marL="1600200" indent="-228600" algn="l" defTabSz="914400" rtl="0" eaLnBrk="1" latinLnBrk="0" hangingPunct="1">
+              <a:lnSpc>
+                <a:spcPct val="90000"/>
+              </a:lnSpc>
+              <a:spcBef>
+                <a:spcPts val="500"/>
+              </a:spcBef>
+              <a:buFont typeface="Arial" panose="020B0604020202020204" pitchFamily="34" charset="0"/>
+              <a:buChar char="•"/>
+              <a:defRPr sz="1800" kern="1200">
+                <a:solidFill>
+                  <a:srgbClr val="00427A"/>
+                </a:solidFill>
+                <a:latin typeface="Calibri" panose="020F0502020204030204" pitchFamily="34" charset="0"/>
+                <a:ea typeface="+mn-ea"/>
+                <a:cs typeface="Calibri" panose="020F0502020204030204" pitchFamily="34" charset="0"/>
+              </a:defRPr>
+            </a:lvl4pPr>
+            <a:lvl5pPr marL="2057400" indent="-228600" algn="l" defTabSz="914400" rtl="0" eaLnBrk="1" latinLnBrk="0" hangingPunct="1">
+              <a:lnSpc>
+                <a:spcPct val="90000"/>
+              </a:lnSpc>
+              <a:spcBef>
+                <a:spcPts val="500"/>
+              </a:spcBef>
+              <a:buFont typeface="Arial" panose="020B0604020202020204" pitchFamily="34" charset="0"/>
+              <a:buChar char="•"/>
+              <a:defRPr sz="1800" kern="1200">
+                <a:solidFill>
+                  <a:srgbClr val="00427A"/>
+                </a:solidFill>
+                <a:latin typeface="Calibri" panose="020F0502020204030204" pitchFamily="34" charset="0"/>
+                <a:ea typeface="+mn-ea"/>
+                <a:cs typeface="Calibri" panose="020F0502020204030204" pitchFamily="34" charset="0"/>
+              </a:defRPr>
+            </a:lvl5pPr>
+            <a:lvl6pPr marL="2514600" indent="-228600" algn="l" defTabSz="914400" rtl="0" eaLnBrk="1" latinLnBrk="0" hangingPunct="1">
+              <a:lnSpc>
+                <a:spcPct val="90000"/>
+              </a:lnSpc>
+              <a:spcBef>
+                <a:spcPts val="500"/>
+              </a:spcBef>
+              <a:buFont typeface="Arial" panose="020B0604020202020204" pitchFamily="34" charset="0"/>
+              <a:buChar char="•"/>
+              <a:defRPr sz="1800" kern="1200">
+                <a:solidFill>
+                  <a:schemeClr val="tx1"/>
+                </a:solidFill>
+                <a:latin typeface="+mn-lt"/>
+                <a:ea typeface="+mn-ea"/>
+                <a:cs typeface="+mn-cs"/>
+              </a:defRPr>
+            </a:lvl6pPr>
+            <a:lvl7pPr marL="2971800" indent="-228600" algn="l" defTabSz="914400" rtl="0" eaLnBrk="1" latinLnBrk="0" hangingPunct="1">
+              <a:lnSpc>
+                <a:spcPct val="90000"/>
+              </a:lnSpc>
+              <a:spcBef>
+                <a:spcPts val="500"/>
+              </a:spcBef>
+              <a:buFont typeface="Arial" panose="020B0604020202020204" pitchFamily="34" charset="0"/>
+              <a:buChar char="•"/>
+              <a:defRPr sz="1800" kern="1200">
+                <a:solidFill>
+                  <a:schemeClr val="tx1"/>
+                </a:solidFill>
+                <a:latin typeface="+mn-lt"/>
+                <a:ea typeface="+mn-ea"/>
+                <a:cs typeface="+mn-cs"/>
+              </a:defRPr>
+            </a:lvl7pPr>
+            <a:lvl8pPr marL="3429000" indent="-228600" algn="l" defTabSz="914400" rtl="0" eaLnBrk="1" latinLnBrk="0" hangingPunct="1">
+              <a:lnSpc>
+                <a:spcPct val="90000"/>
+              </a:lnSpc>
+              <a:spcBef>
+                <a:spcPts val="500"/>
+              </a:spcBef>
+              <a:buFont typeface="Arial" panose="020B0604020202020204" pitchFamily="34" charset="0"/>
+              <a:buChar char="•"/>
+              <a:defRPr sz="1800" kern="1200">
+                <a:solidFill>
+                  <a:schemeClr val="tx1"/>
+                </a:solidFill>
+                <a:latin typeface="+mn-lt"/>
+                <a:ea typeface="+mn-ea"/>
+                <a:cs typeface="+mn-cs"/>
+              </a:defRPr>
+            </a:lvl8pPr>
+            <a:lvl9pPr marL="3886200" indent="-228600" algn="l" defTabSz="914400" rtl="0" eaLnBrk="1" latinLnBrk="0" hangingPunct="1">
+              <a:lnSpc>
+                <a:spcPct val="90000"/>
+              </a:lnSpc>
+              <a:spcBef>
+                <a:spcPts val="500"/>
+              </a:spcBef>
+              <a:buFont typeface="Arial" panose="020B0604020202020204" pitchFamily="34" charset="0"/>
+              <a:buChar char="•"/>
+              <a:defRPr sz="1800" kern="1200">
+                <a:solidFill>
+                  <a:schemeClr val="tx1"/>
+                </a:solidFill>
+                <a:latin typeface="+mn-lt"/>
+                <a:ea typeface="+mn-ea"/>
+                <a:cs typeface="+mn-cs"/>
+              </a:defRPr>
+            </a:lvl9pPr>
+          </a:lstStyle>
+          <a:p>
+            <a:r>
+              <a:rPr lang="en-IE" dirty="0">
+                <a:solidFill>
+                  <a:srgbClr val="009749"/>
+                </a:solidFill>
+              </a:rPr>
+              <a:t>On the board: for these given weights and biases compute the forward pass</a:t>
+            </a:r>
+          </a:p>
+        </p:txBody>
+      </p:sp>
     </p:spTree>
   </p:cSld>
   <p:clrMapOvr>
@@ -11691,8 +11355,8 @@
           </a:p>
         </p:txBody>
       </p:sp>
-      <mc:AlternateContent xmlns:mc="http://schemas.openxmlformats.org/markup-compatibility/2006">
-        <mc:Choice xmlns:a14="http://schemas.microsoft.com/office/drawing/2010/main" Requires="a14">
+      <mc:AlternateContent xmlns:mc="http://schemas.openxmlformats.org/markup-compatibility/2006" xmlns:a14="http://schemas.microsoft.com/office/drawing/2010/main">
+        <mc:Choice Requires="a14">
           <p:sp>
             <p:nvSpPr>
               <p:cNvPr id="3" name="Content Placeholder 2"/>
@@ -11883,7 +11547,7 @@
             </p:txBody>
           </p:sp>
         </mc:Choice>
-        <mc:Fallback>
+        <mc:Fallback xmlns="">
           <p:sp>
             <p:nvSpPr>
               <p:cNvPr id="3" name="Content Placeholder 2"/>
@@ -12240,7 +11904,7 @@
           <a:p>
             <a:fld id="{C1B28D5F-B017-3B47-9775-DA319F6143FF}" type="datetime3">
               <a:rPr lang="en-IE" smtClean="0"/>
-              <a:t>18 February 2026</a:t>
+              <a:t>25 February 2026</a:t>
             </a:fld>
             <a:endParaRPr lang="en-US" dirty="0"/>
           </a:p>
